--- a/Meetings/HE-NEU-RECAP.pptx
+++ b/Meetings/HE-NEU-RECAP.pptx
@@ -5,10 +5,10 @@
     <p:sldMasterId id="2147483696" r:id="rId4"/>
   </p:sldMasterIdLst>
   <p:notesMasterIdLst>
-    <p:notesMasterId r:id="rId28"/>
+    <p:notesMasterId r:id="rId35"/>
   </p:notesMasterIdLst>
   <p:handoutMasterIdLst>
-    <p:handoutMasterId r:id="rId29"/>
+    <p:handoutMasterId r:id="rId36"/>
   </p:handoutMasterIdLst>
   <p:sldIdLst>
     <p:sldId id="334" r:id="rId5"/>
@@ -22,18 +22,25 @@
     <p:sldId id="368" r:id="rId13"/>
     <p:sldId id="375" r:id="rId14"/>
     <p:sldId id="378" r:id="rId15"/>
-    <p:sldId id="376" r:id="rId16"/>
-    <p:sldId id="286" r:id="rId17"/>
-    <p:sldId id="350" r:id="rId18"/>
-    <p:sldId id="263" r:id="rId19"/>
-    <p:sldId id="353" r:id="rId20"/>
-    <p:sldId id="352" r:id="rId21"/>
-    <p:sldId id="354" r:id="rId22"/>
-    <p:sldId id="357" r:id="rId23"/>
-    <p:sldId id="355" r:id="rId24"/>
-    <p:sldId id="370" r:id="rId25"/>
-    <p:sldId id="367" r:id="rId26"/>
-    <p:sldId id="374" r:id="rId27"/>
+    <p:sldId id="380" r:id="rId16"/>
+    <p:sldId id="386" r:id="rId17"/>
+    <p:sldId id="384" r:id="rId18"/>
+    <p:sldId id="379" r:id="rId19"/>
+    <p:sldId id="383" r:id="rId20"/>
+    <p:sldId id="385" r:id="rId21"/>
+    <p:sldId id="376" r:id="rId22"/>
+    <p:sldId id="286" r:id="rId23"/>
+    <p:sldId id="350" r:id="rId24"/>
+    <p:sldId id="263" r:id="rId25"/>
+    <p:sldId id="353" r:id="rId26"/>
+    <p:sldId id="352" r:id="rId27"/>
+    <p:sldId id="354" r:id="rId28"/>
+    <p:sldId id="357" r:id="rId29"/>
+    <p:sldId id="355" r:id="rId30"/>
+    <p:sldId id="370" r:id="rId31"/>
+    <p:sldId id="367" r:id="rId32"/>
+    <p:sldId id="374" r:id="rId33"/>
+    <p:sldId id="382" r:id="rId34"/>
   </p:sldIdLst>
   <p:sldSz cx="12192000" cy="6858000"/>
   <p:notesSz cx="6858000" cy="9144000"/>
@@ -3268,7 +3275,7 @@
             <a:pPr rtl="0"/>
             <a:fld id="{03E67EA5-8EFE-4CDE-A774-E9526279E6E4}" type="datetime1">
               <a:rPr lang="it-IT" smtClean="0"/>
-              <a:t>21/03/2025</a:t>
+              <a:t>24/04/2025</a:t>
             </a:fld>
             <a:endParaRPr lang="it-IT" dirty="0"/>
           </a:p>
@@ -3364,6 +3371,87 @@
   <p:clrMap bg1="lt1" tx1="dk1" bg2="lt2" tx2="dk2" accent1="accent1" accent2="accent2" accent3="accent3" accent4="accent4" accent5="accent5" accent6="accent6" hlink="hlink" folHlink="folHlink"/>
   <p:hf hdr="0" ftr="0" dt="0"/>
 </p:handoutMaster>
+</file>
+
+<file path=ppt/ink/ink1.xml><?xml version="1.0" encoding="utf-8"?>
+<inkml:ink xmlns:inkml="http://www.w3.org/2003/InkML">
+  <inkml:definitions>
+    <inkml:context xml:id="ctx0">
+      <inkml:inkSource xml:id="inkSrc0">
+        <inkml:traceFormat>
+          <inkml:channel name="X" type="integer" min="-2.14748E9" max="2.14748E9" units="cm"/>
+          <inkml:channel name="Y" type="integer" min="-2.14748E9" max="2.14748E9" units="cm"/>
+        </inkml:traceFormat>
+        <inkml:channelProperties>
+          <inkml:channelProperty channel="X" name="resolution" value="1000" units="1/cm"/>
+          <inkml:channelProperty channel="Y" name="resolution" value="1000" units="1/cm"/>
+        </inkml:channelProperties>
+      </inkml:inkSource>
+      <inkml:timestamp xml:id="ts0" timeString="2025-04-24T16:32:56.216"/>
+    </inkml:context>
+    <inkml:brush xml:id="br0">
+      <inkml:brushProperty name="width" value="0.035" units="cm"/>
+      <inkml:brushProperty name="height" value="0.035" units="cm"/>
+      <inkml:brushProperty name="color" value="#E71224"/>
+      <inkml:brushProperty name="ignorePressure" value="1"/>
+    </inkml:brush>
+  </inkml:definitions>
+  <inkml:trace contextRef="#ctx0" brushRef="#br0">1 0,'3860'0,"-3778"0</inkml:trace>
+</inkml:ink>
+</file>
+
+<file path=ppt/ink/ink2.xml><?xml version="1.0" encoding="utf-8"?>
+<inkml:ink xmlns:inkml="http://www.w3.org/2003/InkML">
+  <inkml:definitions>
+    <inkml:context xml:id="ctx0">
+      <inkml:inkSource xml:id="inkSrc0">
+        <inkml:traceFormat>
+          <inkml:channel name="X" type="integer" min="-2.14748E9" max="2.14748E9" units="cm"/>
+          <inkml:channel name="Y" type="integer" min="-2.14748E9" max="2.14748E9" units="cm"/>
+        </inkml:traceFormat>
+        <inkml:channelProperties>
+          <inkml:channelProperty channel="X" name="resolution" value="1000" units="1/cm"/>
+          <inkml:channelProperty channel="Y" name="resolution" value="1000" units="1/cm"/>
+        </inkml:channelProperties>
+      </inkml:inkSource>
+      <inkml:timestamp xml:id="ts0" timeString="2025-04-24T16:33:07.482"/>
+    </inkml:context>
+    <inkml:brush xml:id="br0">
+      <inkml:brushProperty name="width" value="0.035" units="cm"/>
+      <inkml:brushProperty name="height" value="0.035" units="cm"/>
+      <inkml:brushProperty name="color" value="#E71224"/>
+      <inkml:brushProperty name="ignorePressure" value="1"/>
+    </inkml:brush>
+  </inkml:definitions>
+  <inkml:trace contextRef="#ctx0" brushRef="#br0">0 1,'12023'0,"-11989"0</inkml:trace>
+</inkml:ink>
+</file>
+
+<file path=ppt/ink/ink3.xml><?xml version="1.0" encoding="utf-8"?>
+<inkml:ink xmlns:inkml="http://www.w3.org/2003/InkML">
+  <inkml:definitions>
+    <inkml:context xml:id="ctx0">
+      <inkml:inkSource xml:id="inkSrc0">
+        <inkml:traceFormat>
+          <inkml:channel name="X" type="integer" min="-2.14748E9" max="2.14748E9" units="cm"/>
+          <inkml:channel name="Y" type="integer" min="-2.14748E9" max="2.14748E9" units="cm"/>
+        </inkml:traceFormat>
+        <inkml:channelProperties>
+          <inkml:channelProperty channel="X" name="resolution" value="1000" units="1/cm"/>
+          <inkml:channelProperty channel="Y" name="resolution" value="1000" units="1/cm"/>
+        </inkml:channelProperties>
+      </inkml:inkSource>
+      <inkml:timestamp xml:id="ts0" timeString="2025-04-24T16:33:17.769"/>
+    </inkml:context>
+    <inkml:brush xml:id="br0">
+      <inkml:brushProperty name="width" value="0.035" units="cm"/>
+      <inkml:brushProperty name="height" value="0.035" units="cm"/>
+      <inkml:brushProperty name="color" value="#E71224"/>
+      <inkml:brushProperty name="ignorePressure" value="1"/>
+    </inkml:brush>
+  </inkml:definitions>
+  <inkml:trace contextRef="#ctx0" brushRef="#br0">1 1,'10367'0,"-10328"0</inkml:trace>
+</inkml:ink>
 </file>
 
 <file path=ppt/notesMasters/notesMaster1.xml><?xml version="1.0" encoding="utf-8"?>
@@ -3450,7 +3538,7 @@
             <a:pPr rtl="0"/>
             <a:fld id="{78D779EF-F8B6-4ACA-8018-CCDCFAC7DE9C}" type="datetime1">
               <a:rPr lang="it-IT" smtClean="0"/>
-              <a:t>21/03/2025</a:t>
+              <a:t>24/04/2025</a:t>
             </a:fld>
             <a:endParaRPr lang="it-IT" dirty="0"/>
           </a:p>
@@ -3975,7 +4063,7 @@
             <a:pPr rtl="0"/>
             <a:fld id="{D5939589-3E79-4C82-AA4A-FE78234FAA59}" type="slidenum">
               <a:rPr lang="it-IT" smtClean="0"/>
-              <a:t>20</a:t>
+              <a:t>26</a:t>
             </a:fld>
             <a:endParaRPr lang="it-IT" dirty="0"/>
           </a:p>
@@ -4216,7 +4304,7 @@
             <a:pPr rtl="0"/>
             <a:fld id="{D5939589-3E79-4C82-AA4A-FE78234FAA59}" type="slidenum">
               <a:rPr lang="it-IT" smtClean="0"/>
-              <a:t>13</a:t>
+              <a:t>19</a:t>
             </a:fld>
             <a:endParaRPr lang="it-IT" dirty="0"/>
           </a:p>
@@ -4387,7 +4475,7 @@
             <a:pPr rtl="0"/>
             <a:fld id="{D5939589-3E79-4C82-AA4A-FE78234FAA59}" type="slidenum">
               <a:rPr lang="it-IT" smtClean="0"/>
-              <a:t>14</a:t>
+              <a:t>20</a:t>
             </a:fld>
             <a:endParaRPr lang="it-IT" dirty="0"/>
           </a:p>
@@ -4763,7 +4851,7 @@
             <a:pPr rtl="0"/>
             <a:fld id="{D5939589-3E79-4C82-AA4A-FE78234FAA59}" type="slidenum">
               <a:rPr lang="it-IT" smtClean="0"/>
-              <a:t>16</a:t>
+              <a:t>22</a:t>
             </a:fld>
             <a:endParaRPr lang="it-IT" dirty="0"/>
           </a:p>
@@ -4934,7 +5022,7 @@
             <a:pPr rtl="0"/>
             <a:fld id="{D5939589-3E79-4C82-AA4A-FE78234FAA59}" type="slidenum">
               <a:rPr lang="it-IT" smtClean="0"/>
-              <a:t>17</a:t>
+              <a:t>23</a:t>
             </a:fld>
             <a:endParaRPr lang="it-IT" dirty="0"/>
           </a:p>
@@ -5105,7 +5193,7 @@
             <a:pPr rtl="0"/>
             <a:fld id="{D5939589-3E79-4C82-AA4A-FE78234FAA59}" type="slidenum">
               <a:rPr lang="it-IT" smtClean="0"/>
-              <a:t>18</a:t>
+              <a:t>24</a:t>
             </a:fld>
             <a:endParaRPr lang="it-IT" dirty="0"/>
           </a:p>
@@ -5276,7 +5364,7 @@
             <a:pPr rtl="0"/>
             <a:fld id="{D5939589-3E79-4C82-AA4A-FE78234FAA59}" type="slidenum">
               <a:rPr lang="it-IT" smtClean="0"/>
-              <a:t>19</a:t>
+              <a:t>25</a:t>
             </a:fld>
             <a:endParaRPr lang="it-IT" dirty="0"/>
           </a:p>
@@ -16237,6 +16325,1958 @@
           <p:cNvPr id="5" name="Titolo 4">
             <a:extLst>
               <a:ext uri="{FF2B5EF4-FFF2-40B4-BE49-F238E27FC236}">
+                <a16:creationId xmlns:a16="http://schemas.microsoft.com/office/drawing/2014/main" id="{EE2DD013-3865-AD2B-1A14-8DC45C6EEAC1}"/>
+              </a:ext>
+            </a:extLst>
+          </p:cNvPr>
+          <p:cNvSpPr>
+            <a:spLocks noGrp="1"/>
+          </p:cNvSpPr>
+          <p:nvPr>
+            <p:ph type="ctrTitle"/>
+          </p:nvPr>
+        </p:nvSpPr>
+        <p:spPr/>
+        <p:txBody>
+          <a:bodyPr/>
+          <a:lstStyle/>
+          <a:p>
+            <a:r>
+              <a:rPr lang="it-IT" dirty="0"/>
+              <a:t>SN IIP</a:t>
+            </a:r>
+          </a:p>
+        </p:txBody>
+      </p:sp>
+    </p:spTree>
+    <p:extLst>
+      <p:ext uri="{BB962C8B-B14F-4D97-AF65-F5344CB8AC3E}">
+        <p14:creationId xmlns:p14="http://schemas.microsoft.com/office/powerpoint/2010/main" val="3636787564"/>
+      </p:ext>
+    </p:extLst>
+  </p:cSld>
+  <p:clrMapOvr>
+    <a:masterClrMapping/>
+  </p:clrMapOvr>
+</p:sld>
+</file>
+
+<file path=ppt/slides/slide13.xml><?xml version="1.0" encoding="utf-8"?>
+<p:sld xmlns:a="http://schemas.openxmlformats.org/drawingml/2006/main" xmlns:r="http://schemas.openxmlformats.org/officeDocument/2006/relationships" xmlns:p="http://schemas.openxmlformats.org/presentationml/2006/main">
+  <p:cSld>
+    <p:spTree>
+      <p:nvGrpSpPr>
+        <p:cNvPr id="1" name="">
+          <a:extLst>
+            <a:ext uri="{FF2B5EF4-FFF2-40B4-BE49-F238E27FC236}">
+              <a16:creationId xmlns:a16="http://schemas.microsoft.com/office/drawing/2014/main" id="{F0291349-BAE1-424B-DC22-1AD743DE40D3}"/>
+            </a:ext>
+          </a:extLst>
+        </p:cNvPr>
+        <p:cNvGrpSpPr/>
+        <p:nvPr/>
+      </p:nvGrpSpPr>
+      <p:grpSpPr>
+        <a:xfrm>
+          <a:off x="0" y="0"/>
+          <a:ext cx="0" cy="0"/>
+          <a:chOff x="0" y="0"/>
+          <a:chExt cx="0" cy="0"/>
+        </a:xfrm>
+      </p:grpSpPr>
+      <p:sp>
+        <p:nvSpPr>
+          <p:cNvPr id="5" name="Titolo 4">
+            <a:extLst>
+              <a:ext uri="{FF2B5EF4-FFF2-40B4-BE49-F238E27FC236}">
+                <a16:creationId xmlns:a16="http://schemas.microsoft.com/office/drawing/2014/main" id="{CAB42437-F165-C0F7-03DF-9A2C5F4EA975}"/>
+              </a:ext>
+            </a:extLst>
+          </p:cNvPr>
+          <p:cNvSpPr>
+            <a:spLocks noGrp="1"/>
+          </p:cNvSpPr>
+          <p:nvPr>
+            <p:ph type="ctrTitle"/>
+          </p:nvPr>
+        </p:nvSpPr>
+        <p:spPr/>
+        <p:txBody>
+          <a:bodyPr/>
+          <a:lstStyle/>
+          <a:p>
+            <a:r>
+              <a:rPr lang="it-IT" dirty="0"/>
+              <a:t>SN IIP</a:t>
+            </a:r>
+          </a:p>
+        </p:txBody>
+      </p:sp>
+    </p:spTree>
+    <p:extLst>
+      <p:ext uri="{BB962C8B-B14F-4D97-AF65-F5344CB8AC3E}">
+        <p14:creationId xmlns:p14="http://schemas.microsoft.com/office/powerpoint/2010/main" val="1937966817"/>
+      </p:ext>
+    </p:extLst>
+  </p:cSld>
+  <p:clrMapOvr>
+    <a:masterClrMapping/>
+  </p:clrMapOvr>
+</p:sld>
+</file>
+
+<file path=ppt/slides/slide14.xml><?xml version="1.0" encoding="utf-8"?>
+<p:sld xmlns:a="http://schemas.openxmlformats.org/drawingml/2006/main" xmlns:r="http://schemas.openxmlformats.org/officeDocument/2006/relationships" xmlns:p="http://schemas.openxmlformats.org/presentationml/2006/main">
+  <p:cSld>
+    <p:spTree>
+      <p:nvGrpSpPr>
+        <p:cNvPr id="1" name=""/>
+        <p:cNvGrpSpPr/>
+        <p:nvPr/>
+      </p:nvGrpSpPr>
+      <p:grpSpPr>
+        <a:xfrm>
+          <a:off x="0" y="0"/>
+          <a:ext cx="0" cy="0"/>
+          <a:chOff x="0" y="0"/>
+          <a:chExt cx="0" cy="0"/>
+        </a:xfrm>
+      </p:grpSpPr>
+      <p:sp>
+        <p:nvSpPr>
+          <p:cNvPr id="2" name="Titolo 1">
+            <a:extLst>
+              <a:ext uri="{FF2B5EF4-FFF2-40B4-BE49-F238E27FC236}">
+                <a16:creationId xmlns:a16="http://schemas.microsoft.com/office/drawing/2014/main" id="{E235CC70-BD4D-7088-A020-AD0C8FBFA89D}"/>
+              </a:ext>
+            </a:extLst>
+          </p:cNvPr>
+          <p:cNvSpPr>
+            <a:spLocks noGrp="1"/>
+          </p:cNvSpPr>
+          <p:nvPr>
+            <p:ph type="title"/>
+          </p:nvPr>
+        </p:nvSpPr>
+        <p:spPr>
+          <a:xfrm>
+            <a:off x="2039628" y="679635"/>
+            <a:ext cx="9137012" cy="1280160"/>
+          </a:xfrm>
+        </p:spPr>
+        <p:txBody>
+          <a:bodyPr/>
+          <a:lstStyle/>
+          <a:p>
+            <a:r>
+              <a:rPr lang="it-IT" dirty="0" err="1"/>
+              <a:t>Modeling</a:t>
+            </a:r>
+            <a:r>
+              <a:rPr lang="it-IT" dirty="0"/>
+              <a:t> the </a:t>
+            </a:r>
+            <a:r>
+              <a:rPr lang="it-IT" dirty="0" err="1"/>
+              <a:t>flux</a:t>
+            </a:r>
+            <a:endParaRPr lang="it-IT" dirty="0"/>
+          </a:p>
+        </p:txBody>
+      </p:sp>
+      <p:pic>
+        <p:nvPicPr>
+          <p:cNvPr id="6" name="Segnaposto contenuto 5">
+            <a:extLst>
+              <a:ext uri="{FF2B5EF4-FFF2-40B4-BE49-F238E27FC236}">
+                <a16:creationId xmlns:a16="http://schemas.microsoft.com/office/drawing/2014/main" id="{2A1076DB-C61F-A13A-883D-4E5257F500C5}"/>
+              </a:ext>
+            </a:extLst>
+          </p:cNvPr>
+          <p:cNvPicPr>
+            <a:picLocks noGrp="1" noChangeAspect="1"/>
+          </p:cNvPicPr>
+          <p:nvPr>
+            <p:ph sz="half" idx="2"/>
+          </p:nvPr>
+        </p:nvPicPr>
+        <p:blipFill>
+          <a:blip r:embed="rId2"/>
+          <a:stretch>
+            <a:fillRect/>
+          </a:stretch>
+        </p:blipFill>
+        <p:spPr>
+          <a:xfrm>
+            <a:off x="869793" y="2405700"/>
+            <a:ext cx="5455239" cy="4040574"/>
+          </a:xfrm>
+        </p:spPr>
+      </p:pic>
+      <p:pic>
+        <p:nvPicPr>
+          <p:cNvPr id="7" name="Google Shape;172;p21">
+            <a:extLst>
+              <a:ext uri="{FF2B5EF4-FFF2-40B4-BE49-F238E27FC236}">
+                <a16:creationId xmlns:a16="http://schemas.microsoft.com/office/drawing/2014/main" id="{156CD657-6D97-7D7D-22B7-10C68461E7DD}"/>
+              </a:ext>
+            </a:extLst>
+          </p:cNvPr>
+          <p:cNvPicPr preferRelativeResize="0">
+            <a:picLocks noGrp="1"/>
+          </p:cNvPicPr>
+          <p:nvPr>
+            <p:ph sz="quarter" idx="4"/>
+          </p:nvPr>
+        </p:nvPicPr>
+        <p:blipFill>
+          <a:blip r:embed="rId3">
+            <a:alphaModFix/>
+          </a:blip>
+          <a:stretch>
+            <a:fillRect/>
+          </a:stretch>
+        </p:blipFill>
+        <p:spPr>
+          <a:xfrm>
+            <a:off x="6511106" y="2203512"/>
+            <a:ext cx="5284450" cy="4444949"/>
+          </a:xfrm>
+          <a:prstGeom prst="rect">
+            <a:avLst/>
+          </a:prstGeom>
+          <a:noFill/>
+          <a:ln>
+            <a:noFill/>
+          </a:ln>
+        </p:spPr>
+      </p:pic>
+      <p:sp>
+        <p:nvSpPr>
+          <p:cNvPr id="8" name="Rettangolo 7">
+            <a:extLst>
+              <a:ext uri="{FF2B5EF4-FFF2-40B4-BE49-F238E27FC236}">
+                <a16:creationId xmlns:a16="http://schemas.microsoft.com/office/drawing/2014/main" id="{0F131DC1-F8FC-8B54-2B6D-AE5285E4D7F9}"/>
+              </a:ext>
+            </a:extLst>
+          </p:cNvPr>
+          <p:cNvSpPr/>
+          <p:nvPr/>
+        </p:nvSpPr>
+        <p:spPr>
+          <a:xfrm>
+            <a:off x="8713382" y="3163186"/>
+            <a:ext cx="1501004" cy="531628"/>
+          </a:xfrm>
+          <a:prstGeom prst="rect">
+            <a:avLst/>
+          </a:prstGeom>
+          <a:solidFill>
+            <a:schemeClr val="accent2">
+              <a:lumMod val="60000"/>
+              <a:lumOff val="40000"/>
+              <a:alpha val="50000"/>
+            </a:schemeClr>
+          </a:solidFill>
+          <a:ln>
+            <a:noFill/>
+          </a:ln>
+        </p:spPr>
+        <p:style>
+          <a:lnRef idx="0">
+            <a:scrgbClr r="0" g="0" b="0"/>
+          </a:lnRef>
+          <a:fillRef idx="0">
+            <a:scrgbClr r="0" g="0" b="0"/>
+          </a:fillRef>
+          <a:effectRef idx="0">
+            <a:scrgbClr r="0" g="0" b="0"/>
+          </a:effectRef>
+          <a:fontRef idx="minor">
+            <a:schemeClr val="lt1"/>
+          </a:fontRef>
+        </p:style>
+        <p:txBody>
+          <a:bodyPr rtlCol="0" anchor="ctr"/>
+          <a:lstStyle/>
+          <a:p>
+            <a:pPr algn="ctr"/>
+            <a:endParaRPr lang="it-IT"/>
+          </a:p>
+        </p:txBody>
+      </p:sp>
+      <p:sp>
+        <p:nvSpPr>
+          <p:cNvPr id="9" name="Ovale 8">
+            <a:extLst>
+              <a:ext uri="{FF2B5EF4-FFF2-40B4-BE49-F238E27FC236}">
+                <a16:creationId xmlns:a16="http://schemas.microsoft.com/office/drawing/2014/main" id="{E6311220-DAC7-49A1-B00A-3D01E74924B5}"/>
+              </a:ext>
+            </a:extLst>
+          </p:cNvPr>
+          <p:cNvSpPr/>
+          <p:nvPr/>
+        </p:nvSpPr>
+        <p:spPr>
+          <a:xfrm>
+            <a:off x="8713382" y="3211033"/>
+            <a:ext cx="1501004" cy="446567"/>
+          </a:xfrm>
+          <a:prstGeom prst="ellipse">
+            <a:avLst/>
+          </a:prstGeom>
+          <a:solidFill>
+            <a:srgbClr val="FF8112">
+              <a:alpha val="50000"/>
+            </a:srgbClr>
+          </a:solidFill>
+          <a:ln>
+            <a:noFill/>
+          </a:ln>
+        </p:spPr>
+        <p:style>
+          <a:lnRef idx="0">
+            <a:scrgbClr r="0" g="0" b="0"/>
+          </a:lnRef>
+          <a:fillRef idx="0">
+            <a:scrgbClr r="0" g="0" b="0"/>
+          </a:fillRef>
+          <a:effectRef idx="0">
+            <a:scrgbClr r="0" g="0" b="0"/>
+          </a:effectRef>
+          <a:fontRef idx="minor">
+            <a:schemeClr val="lt1"/>
+          </a:fontRef>
+        </p:style>
+        <p:txBody>
+          <a:bodyPr rtlCol="0" anchor="ctr"/>
+          <a:lstStyle/>
+          <a:p>
+            <a:pPr algn="ctr"/>
+            <a:endParaRPr lang="it-IT" dirty="0"/>
+          </a:p>
+        </p:txBody>
+      </p:sp>
+      <p:sp>
+        <p:nvSpPr>
+          <p:cNvPr id="10" name="Ovale 9">
+            <a:extLst>
+              <a:ext uri="{FF2B5EF4-FFF2-40B4-BE49-F238E27FC236}">
+                <a16:creationId xmlns:a16="http://schemas.microsoft.com/office/drawing/2014/main" id="{BD0BA0FF-FBBC-3255-0D7A-2046BE0ABE56}"/>
+              </a:ext>
+            </a:extLst>
+          </p:cNvPr>
+          <p:cNvSpPr/>
+          <p:nvPr/>
+        </p:nvSpPr>
+        <p:spPr>
+          <a:xfrm rot="994157">
+            <a:off x="9687342" y="4961153"/>
+            <a:ext cx="2342500" cy="446567"/>
+          </a:xfrm>
+          <a:prstGeom prst="ellipse">
+            <a:avLst/>
+          </a:prstGeom>
+          <a:solidFill>
+            <a:srgbClr val="FF8112">
+              <a:alpha val="50000"/>
+            </a:srgbClr>
+          </a:solidFill>
+          <a:ln>
+            <a:noFill/>
+          </a:ln>
+        </p:spPr>
+        <p:style>
+          <a:lnRef idx="0">
+            <a:scrgbClr r="0" g="0" b="0"/>
+          </a:lnRef>
+          <a:fillRef idx="0">
+            <a:scrgbClr r="0" g="0" b="0"/>
+          </a:fillRef>
+          <a:effectRef idx="0">
+            <a:scrgbClr r="0" g="0" b="0"/>
+          </a:effectRef>
+          <a:fontRef idx="minor">
+            <a:schemeClr val="lt1"/>
+          </a:fontRef>
+        </p:style>
+        <p:txBody>
+          <a:bodyPr rtlCol="0" anchor="ctr"/>
+          <a:lstStyle/>
+          <a:p>
+            <a:pPr algn="ctr"/>
+            <a:endParaRPr lang="it-IT" dirty="0"/>
+          </a:p>
+        </p:txBody>
+      </p:sp>
+      <p:cxnSp>
+        <p:nvCxnSpPr>
+          <p:cNvPr id="12" name="Connettore curvo 11">
+            <a:extLst>
+              <a:ext uri="{FF2B5EF4-FFF2-40B4-BE49-F238E27FC236}">
+                <a16:creationId xmlns:a16="http://schemas.microsoft.com/office/drawing/2014/main" id="{30A90785-C9D2-AB8C-F0EB-52EC0663530E}"/>
+              </a:ext>
+            </a:extLst>
+          </p:cNvPr>
+          <p:cNvCxnSpPr>
+            <a:cxnSpLocks/>
+          </p:cNvCxnSpPr>
+          <p:nvPr/>
+        </p:nvCxnSpPr>
+        <p:spPr>
+          <a:xfrm>
+            <a:off x="3798615" y="2625484"/>
+            <a:ext cx="5317444" cy="558968"/>
+          </a:xfrm>
+          <a:prstGeom prst="curvedConnector3">
+            <a:avLst>
+              <a:gd name="adj1" fmla="val 100989"/>
+            </a:avLst>
+          </a:prstGeom>
+          <a:ln w="28575">
+            <a:tailEnd type="triangle"/>
+          </a:ln>
+        </p:spPr>
+        <p:style>
+          <a:lnRef idx="1">
+            <a:schemeClr val="accent2"/>
+          </a:lnRef>
+          <a:fillRef idx="0">
+            <a:schemeClr val="accent2"/>
+          </a:fillRef>
+          <a:effectRef idx="0">
+            <a:schemeClr val="accent2"/>
+          </a:effectRef>
+          <a:fontRef idx="minor">
+            <a:schemeClr val="tx1"/>
+          </a:fontRef>
+        </p:style>
+      </p:cxnSp>
+      <p:cxnSp>
+        <p:nvCxnSpPr>
+          <p:cNvPr id="16" name="Connettore curvo 15">
+            <a:extLst>
+              <a:ext uri="{FF2B5EF4-FFF2-40B4-BE49-F238E27FC236}">
+                <a16:creationId xmlns:a16="http://schemas.microsoft.com/office/drawing/2014/main" id="{D6F7995A-9D6F-8975-D0AD-7181F9C40E22}"/>
+              </a:ext>
+            </a:extLst>
+          </p:cNvPr>
+          <p:cNvCxnSpPr>
+            <a:cxnSpLocks/>
+            <a:endCxn id="9" idx="2"/>
+          </p:cNvCxnSpPr>
+          <p:nvPr/>
+        </p:nvCxnSpPr>
+        <p:spPr>
+          <a:xfrm>
+            <a:off x="4765912" y="3051544"/>
+            <a:ext cx="3947470" cy="382773"/>
+          </a:xfrm>
+          <a:prstGeom prst="curvedConnector3">
+            <a:avLst>
+              <a:gd name="adj1" fmla="val 50000"/>
+            </a:avLst>
+          </a:prstGeom>
+          <a:ln w="28575">
+            <a:solidFill>
+              <a:srgbClr val="FF8112"/>
+            </a:solidFill>
+            <a:tailEnd type="triangle"/>
+          </a:ln>
+        </p:spPr>
+        <p:style>
+          <a:lnRef idx="1">
+            <a:schemeClr val="accent1"/>
+          </a:lnRef>
+          <a:fillRef idx="0">
+            <a:schemeClr val="accent1"/>
+          </a:fillRef>
+          <a:effectRef idx="0">
+            <a:schemeClr val="accent1"/>
+          </a:effectRef>
+          <a:fontRef idx="minor">
+            <a:schemeClr val="tx1"/>
+          </a:fontRef>
+        </p:style>
+      </p:cxnSp>
+      <p:cxnSp>
+        <p:nvCxnSpPr>
+          <p:cNvPr id="18" name="Connettore curvo 17">
+            <a:extLst>
+              <a:ext uri="{FF2B5EF4-FFF2-40B4-BE49-F238E27FC236}">
+                <a16:creationId xmlns:a16="http://schemas.microsoft.com/office/drawing/2014/main" id="{6912A4AA-D416-FD5F-06FD-ACDE78F89852}"/>
+              </a:ext>
+            </a:extLst>
+          </p:cNvPr>
+          <p:cNvCxnSpPr>
+            <a:endCxn id="10" idx="2"/>
+          </p:cNvCxnSpPr>
+          <p:nvPr/>
+        </p:nvCxnSpPr>
+        <p:spPr>
+          <a:xfrm>
+            <a:off x="4759147" y="3033470"/>
+            <a:ext cx="4976830" cy="1816956"/>
+          </a:xfrm>
+          <a:prstGeom prst="curvedConnector3">
+            <a:avLst>
+              <a:gd name="adj1" fmla="val 41882"/>
+            </a:avLst>
+          </a:prstGeom>
+          <a:ln w="28575">
+            <a:solidFill>
+              <a:srgbClr val="FF8112"/>
+            </a:solidFill>
+            <a:tailEnd type="triangle"/>
+          </a:ln>
+        </p:spPr>
+        <p:style>
+          <a:lnRef idx="1">
+            <a:schemeClr val="accent1"/>
+          </a:lnRef>
+          <a:fillRef idx="0">
+            <a:schemeClr val="accent1"/>
+          </a:fillRef>
+          <a:effectRef idx="0">
+            <a:schemeClr val="accent1"/>
+          </a:effectRef>
+          <a:fontRef idx="minor">
+            <a:schemeClr val="tx1"/>
+          </a:fontRef>
+        </p:style>
+      </p:cxnSp>
+    </p:spTree>
+    <p:extLst>
+      <p:ext uri="{BB962C8B-B14F-4D97-AF65-F5344CB8AC3E}">
+        <p14:creationId xmlns:p14="http://schemas.microsoft.com/office/powerpoint/2010/main" val="1687255154"/>
+      </p:ext>
+    </p:extLst>
+  </p:cSld>
+  <p:clrMapOvr>
+    <a:masterClrMapping/>
+  </p:clrMapOvr>
+</p:sld>
+</file>
+
+<file path=ppt/slides/slide15.xml><?xml version="1.0" encoding="utf-8"?>
+<p:sld xmlns:a="http://schemas.openxmlformats.org/drawingml/2006/main" xmlns:r="http://schemas.openxmlformats.org/officeDocument/2006/relationships" xmlns:p="http://schemas.openxmlformats.org/presentationml/2006/main">
+  <p:cSld>
+    <p:spTree>
+      <p:nvGrpSpPr>
+        <p:cNvPr id="1" name="">
+          <a:extLst>
+            <a:ext uri="{FF2B5EF4-FFF2-40B4-BE49-F238E27FC236}">
+              <a16:creationId xmlns:a16="http://schemas.microsoft.com/office/drawing/2014/main" id="{47C0E0CD-883A-DA42-02E3-43E8236BCE32}"/>
+            </a:ext>
+          </a:extLst>
+        </p:cNvPr>
+        <p:cNvGrpSpPr/>
+        <p:nvPr/>
+      </p:nvGrpSpPr>
+      <p:grpSpPr>
+        <a:xfrm>
+          <a:off x="0" y="0"/>
+          <a:ext cx="0" cy="0"/>
+          <a:chOff x="0" y="0"/>
+          <a:chExt cx="0" cy="0"/>
+        </a:xfrm>
+      </p:grpSpPr>
+      <mc:AlternateContent xmlns:mc="http://schemas.openxmlformats.org/markup-compatibility/2006" xmlns:a14="http://schemas.microsoft.com/office/drawing/2010/main">
+        <mc:Choice Requires="a14">
+          <p:sp>
+            <p:nvSpPr>
+              <p:cNvPr id="2" name="Titolo 1">
+                <a:extLst>
+                  <a:ext uri="{FF2B5EF4-FFF2-40B4-BE49-F238E27FC236}">
+                    <a16:creationId xmlns:a16="http://schemas.microsoft.com/office/drawing/2014/main" id="{62CC1EBC-091C-C55C-46A0-8664F35055A0}"/>
+                  </a:ext>
+                </a:extLst>
+              </p:cNvPr>
+              <p:cNvSpPr>
+                <a:spLocks noGrp="1"/>
+              </p:cNvSpPr>
+              <p:nvPr>
+                <p:ph type="title"/>
+              </p:nvPr>
+            </p:nvSpPr>
+            <p:spPr>
+              <a:xfrm>
+                <a:off x="859245" y="707903"/>
+                <a:ext cx="9137012" cy="1280160"/>
+              </a:xfrm>
+            </p:spPr>
+            <p:txBody>
+              <a:bodyPr/>
+              <a:lstStyle/>
+              <a:p>
+                <a:r>
+                  <a:rPr lang="it-IT" dirty="0"/>
+                  <a:t>sensitivity (</a:t>
+                </a:r>
+                <a14:m>
+                  <m:oMath xmlns:m="http://schemas.openxmlformats.org/officeDocument/2006/math">
+                    <m:acc>
+                      <m:accPr>
+                        <m:chr m:val="̅"/>
+                        <m:ctrlPr>
+                          <a:rPr lang="it-IT" i="1" cap="none">
+                            <a:latin typeface="Cambria Math" panose="02040503050406030204" pitchFamily="18" charset="0"/>
+                          </a:rPr>
+                        </m:ctrlPr>
+                      </m:accPr>
+                      <m:e>
+                        <m:sSub>
+                          <m:sSubPr>
+                            <m:ctrlPr>
+                              <a:rPr lang="it-IT" i="1" cap="none">
+                                <a:latin typeface="Cambria Math" panose="02040503050406030204" pitchFamily="18" charset="0"/>
+                              </a:rPr>
+                            </m:ctrlPr>
+                          </m:sSubPr>
+                          <m:e>
+                            <m:r>
+                              <a:rPr lang="it-IT" i="1" cap="none">
+                                <a:latin typeface="Cambria Math" panose="02040503050406030204" pitchFamily="18" charset="0"/>
+                              </a:rPr>
+                              <m:t>𝝂</m:t>
+                            </m:r>
+                          </m:e>
+                          <m:sub>
+                            <m:r>
+                              <a:rPr lang="it-IT" i="1" cap="none">
+                                <a:latin typeface="Cambria Math" panose="02040503050406030204" pitchFamily="18" charset="0"/>
+                              </a:rPr>
+                              <m:t>𝝁</m:t>
+                            </m:r>
+                          </m:sub>
+                        </m:sSub>
+                      </m:e>
+                    </m:acc>
+                    <m:r>
+                      <a:rPr lang="it-IT" b="1" i="0" cap="none" smtClean="0">
+                        <a:latin typeface="Cambria Math" panose="02040503050406030204" pitchFamily="18" charset="0"/>
+                      </a:rPr>
+                      <m:t>+</m:t>
+                    </m:r>
+                    <m:sSub>
+                      <m:sSubPr>
+                        <m:ctrlPr>
+                          <a:rPr lang="it-IT" b="1" i="1" cap="none" smtClean="0">
+                            <a:latin typeface="Cambria Math" panose="02040503050406030204" pitchFamily="18" charset="0"/>
+                          </a:rPr>
+                        </m:ctrlPr>
+                      </m:sSubPr>
+                      <m:e>
+                        <m:r>
+                          <a:rPr lang="it-IT" b="1" i="1" cap="none" smtClean="0">
+                            <a:latin typeface="Cambria Math" panose="02040503050406030204" pitchFamily="18" charset="0"/>
+                          </a:rPr>
+                          <m:t>𝝂</m:t>
+                        </m:r>
+                      </m:e>
+                      <m:sub>
+                        <m:r>
+                          <a:rPr lang="it-IT" b="1" i="1" cap="none" smtClean="0">
+                            <a:latin typeface="Cambria Math" panose="02040503050406030204" pitchFamily="18" charset="0"/>
+                          </a:rPr>
+                          <m:t>𝝁</m:t>
+                        </m:r>
+                      </m:sub>
+                    </m:sSub>
+                  </m:oMath>
+                </a14:m>
+                <a:r>
+                  <a:rPr lang="it-IT" dirty="0"/>
+                  <a:t>) (1 </a:t>
+                </a:r>
+                <a:r>
+                  <a:rPr lang="it-IT" dirty="0" err="1"/>
+                  <a:t>yr</a:t>
+                </a:r>
+                <a:r>
+                  <a:rPr lang="it-IT" dirty="0"/>
+                  <a:t>)</a:t>
+                </a:r>
+              </a:p>
+            </p:txBody>
+          </p:sp>
+        </mc:Choice>
+        <mc:Fallback xmlns="">
+          <p:sp>
+            <p:nvSpPr>
+              <p:cNvPr id="2" name="Titolo 1">
+                <a:extLst>
+                  <a:ext uri="{FF2B5EF4-FFF2-40B4-BE49-F238E27FC236}">
+                    <a16:creationId xmlns:a16="http://schemas.microsoft.com/office/drawing/2014/main" id="{62CC1EBC-091C-C55C-46A0-8664F35055A0}"/>
+                  </a:ext>
+                </a:extLst>
+              </p:cNvPr>
+              <p:cNvSpPr>
+                <a:spLocks noGrp="1" noRot="1" noChangeAspect="1" noMove="1" noResize="1" noEditPoints="1" noAdjustHandles="1" noChangeArrowheads="1" noChangeShapeType="1" noTextEdit="1"/>
+              </p:cNvSpPr>
+              <p:nvPr>
+                <p:ph type="title"/>
+              </p:nvPr>
+            </p:nvSpPr>
+            <p:spPr>
+              <a:xfrm>
+                <a:off x="859245" y="707903"/>
+                <a:ext cx="9137012" cy="1280160"/>
+              </a:xfrm>
+              <a:blipFill>
+                <a:blip r:embed="rId2"/>
+                <a:stretch>
+                  <a:fillRect l="-3402" b="-20000"/>
+                </a:stretch>
+              </a:blipFill>
+            </p:spPr>
+            <p:txBody>
+              <a:bodyPr/>
+              <a:lstStyle/>
+              <a:p>
+                <a:r>
+                  <a:rPr lang="it-IT">
+                    <a:noFill/>
+                  </a:rPr>
+                  <a:t> </a:t>
+                </a:r>
+              </a:p>
+            </p:txBody>
+          </p:sp>
+        </mc:Fallback>
+      </mc:AlternateContent>
+      <p:sp>
+        <p:nvSpPr>
+          <p:cNvPr id="3" name="CasellaDiTesto 2">
+            <a:extLst>
+              <a:ext uri="{FF2B5EF4-FFF2-40B4-BE49-F238E27FC236}">
+                <a16:creationId xmlns:a16="http://schemas.microsoft.com/office/drawing/2014/main" id="{CBE081B5-2982-0634-F191-3AC2F2BAB9DD}"/>
+              </a:ext>
+            </a:extLst>
+          </p:cNvPr>
+          <p:cNvSpPr txBox="1"/>
+          <p:nvPr/>
+        </p:nvSpPr>
+        <p:spPr>
+          <a:xfrm>
+            <a:off x="1607127" y="3768437"/>
+            <a:ext cx="2216727" cy="369332"/>
+          </a:xfrm>
+          <a:prstGeom prst="rect">
+            <a:avLst/>
+          </a:prstGeom>
+          <a:noFill/>
+        </p:spPr>
+        <p:txBody>
+          <a:bodyPr wrap="square" rtlCol="0">
+            <a:spAutoFit/>
+          </a:bodyPr>
+          <a:lstStyle/>
+          <a:p>
+            <a:r>
+              <a:rPr lang="it-IT" dirty="0">
+                <a:solidFill>
+                  <a:schemeClr val="bg1">
+                    <a:lumMod val="75000"/>
+                  </a:schemeClr>
+                </a:solidFill>
+              </a:rPr>
+              <a:t>Preliminary </a:t>
+            </a:r>
+            <a:r>
+              <a:rPr lang="it-IT" dirty="0" err="1">
+                <a:solidFill>
+                  <a:schemeClr val="bg1">
+                    <a:lumMod val="75000"/>
+                  </a:schemeClr>
+                </a:solidFill>
+              </a:rPr>
+              <a:t>results</a:t>
+            </a:r>
+            <a:endParaRPr lang="it-IT" dirty="0">
+              <a:solidFill>
+                <a:schemeClr val="bg1">
+                  <a:lumMod val="75000"/>
+                </a:schemeClr>
+              </a:solidFill>
+            </a:endParaRPr>
+          </a:p>
+        </p:txBody>
+      </p:sp>
+      <p:sp>
+        <p:nvSpPr>
+          <p:cNvPr id="7" name="Segnaposto contenuto 6">
+            <a:extLst>
+              <a:ext uri="{FF2B5EF4-FFF2-40B4-BE49-F238E27FC236}">
+                <a16:creationId xmlns:a16="http://schemas.microsoft.com/office/drawing/2014/main" id="{F9CCA6E7-AD68-6390-1D8A-F01AD1F0E13B}"/>
+              </a:ext>
+            </a:extLst>
+          </p:cNvPr>
+          <p:cNvSpPr>
+            <a:spLocks noGrp="1"/>
+          </p:cNvSpPr>
+          <p:nvPr>
+            <p:ph sz="half" idx="2"/>
+          </p:nvPr>
+        </p:nvSpPr>
+        <p:spPr>
+          <a:xfrm>
+            <a:off x="1280160" y="2327440"/>
+            <a:ext cx="4846320" cy="498887"/>
+          </a:xfrm>
+        </p:spPr>
+        <p:txBody>
+          <a:bodyPr/>
+          <a:lstStyle/>
+          <a:p>
+            <a:r>
+              <a:rPr lang="it-IT" dirty="0"/>
+              <a:t>Sn IIP model by </a:t>
+            </a:r>
+            <a:r>
+              <a:rPr lang="it-IT" dirty="0" err="1"/>
+              <a:t>Murase</a:t>
+            </a:r>
+            <a:r>
+              <a:rPr lang="it-IT" dirty="0"/>
+              <a:t>, sources </a:t>
+            </a:r>
+            <a:r>
+              <a:rPr lang="it-IT" dirty="0" err="1"/>
+              <a:t>distance</a:t>
+            </a:r>
+            <a:r>
+              <a:rPr lang="it-IT" dirty="0"/>
+              <a:t> d=1Mpc, </a:t>
+            </a:r>
+            <a:r>
+              <a:rPr lang="it-IT" dirty="0" err="1"/>
+              <a:t>numu+anumu</a:t>
+            </a:r>
+            <a:endParaRPr lang="it-IT" dirty="0"/>
+          </a:p>
+        </p:txBody>
+      </p:sp>
+      <p:pic>
+        <p:nvPicPr>
+          <p:cNvPr id="11" name="Immagine 10">
+            <a:extLst>
+              <a:ext uri="{FF2B5EF4-FFF2-40B4-BE49-F238E27FC236}">
+                <a16:creationId xmlns:a16="http://schemas.microsoft.com/office/drawing/2014/main" id="{0E9A3A22-929A-8AFE-73BF-E9AFBAEE4B88}"/>
+              </a:ext>
+            </a:extLst>
+          </p:cNvPr>
+          <p:cNvPicPr>
+            <a:picLocks noChangeAspect="1"/>
+          </p:cNvPicPr>
+          <p:nvPr/>
+        </p:nvPicPr>
+        <p:blipFill>
+          <a:blip r:embed="rId3"/>
+          <a:stretch>
+            <a:fillRect/>
+          </a:stretch>
+        </p:blipFill>
+        <p:spPr>
+          <a:xfrm>
+            <a:off x="599825" y="2897834"/>
+            <a:ext cx="5952732" cy="3124260"/>
+          </a:xfrm>
+          <a:prstGeom prst="rect">
+            <a:avLst/>
+          </a:prstGeom>
+        </p:spPr>
+      </p:pic>
+      <p:pic>
+        <p:nvPicPr>
+          <p:cNvPr id="14" name="Immagine 13">
+            <a:extLst>
+              <a:ext uri="{FF2B5EF4-FFF2-40B4-BE49-F238E27FC236}">
+                <a16:creationId xmlns:a16="http://schemas.microsoft.com/office/drawing/2014/main" id="{AEC942AE-C410-3AC5-F0F0-EA96CE75AAF9}"/>
+              </a:ext>
+            </a:extLst>
+          </p:cNvPr>
+          <p:cNvPicPr>
+            <a:picLocks noChangeAspect="1"/>
+          </p:cNvPicPr>
+          <p:nvPr/>
+        </p:nvPicPr>
+        <p:blipFill>
+          <a:blip r:embed="rId4"/>
+          <a:srcRect/>
+          <a:stretch/>
+        </p:blipFill>
+        <p:spPr>
+          <a:xfrm>
+            <a:off x="6552557" y="2045516"/>
+            <a:ext cx="5454392" cy="4184506"/>
+          </a:xfrm>
+          <a:prstGeom prst="rect">
+            <a:avLst/>
+          </a:prstGeom>
+        </p:spPr>
+      </p:pic>
+    </p:spTree>
+    <p:extLst>
+      <p:ext uri="{BB962C8B-B14F-4D97-AF65-F5344CB8AC3E}">
+        <p14:creationId xmlns:p14="http://schemas.microsoft.com/office/powerpoint/2010/main" val="2278366478"/>
+      </p:ext>
+    </p:extLst>
+  </p:cSld>
+  <p:clrMapOvr>
+    <a:masterClrMapping/>
+  </p:clrMapOvr>
+</p:sld>
+</file>
+
+<file path=ppt/slides/slide16.xml><?xml version="1.0" encoding="utf-8"?>
+<p:sld xmlns:a="http://schemas.openxmlformats.org/drawingml/2006/main" xmlns:r="http://schemas.openxmlformats.org/officeDocument/2006/relationships" xmlns:p="http://schemas.openxmlformats.org/presentationml/2006/main">
+  <p:cSld>
+    <p:spTree>
+      <p:nvGrpSpPr>
+        <p:cNvPr id="1" name="">
+          <a:extLst>
+            <a:ext uri="{FF2B5EF4-FFF2-40B4-BE49-F238E27FC236}">
+              <a16:creationId xmlns:a16="http://schemas.microsoft.com/office/drawing/2014/main" id="{41E80E98-6951-87FA-6DC4-75E7886740EF}"/>
+            </a:ext>
+          </a:extLst>
+        </p:cNvPr>
+        <p:cNvGrpSpPr/>
+        <p:nvPr/>
+      </p:nvGrpSpPr>
+      <p:grpSpPr>
+        <a:xfrm>
+          <a:off x="0" y="0"/>
+          <a:ext cx="0" cy="0"/>
+          <a:chOff x="0" y="0"/>
+          <a:chExt cx="0" cy="0"/>
+        </a:xfrm>
+      </p:grpSpPr>
+      <mc:AlternateContent xmlns:mc="http://schemas.openxmlformats.org/markup-compatibility/2006" xmlns:a14="http://schemas.microsoft.com/office/drawing/2010/main">
+        <mc:Choice Requires="a14">
+          <p:sp>
+            <p:nvSpPr>
+              <p:cNvPr id="2" name="Titolo 1">
+                <a:extLst>
+                  <a:ext uri="{FF2B5EF4-FFF2-40B4-BE49-F238E27FC236}">
+                    <a16:creationId xmlns:a16="http://schemas.microsoft.com/office/drawing/2014/main" id="{0670722B-3C39-174F-7DE6-B75BF040C467}"/>
+                  </a:ext>
+                </a:extLst>
+              </p:cNvPr>
+              <p:cNvSpPr>
+                <a:spLocks noGrp="1"/>
+              </p:cNvSpPr>
+              <p:nvPr>
+                <p:ph type="title"/>
+              </p:nvPr>
+            </p:nvSpPr>
+            <p:spPr>
+              <a:xfrm>
+                <a:off x="859245" y="707903"/>
+                <a:ext cx="9137012" cy="1280160"/>
+              </a:xfrm>
+            </p:spPr>
+            <p:txBody>
+              <a:bodyPr/>
+              <a:lstStyle/>
+              <a:p>
+                <a:r>
+                  <a:rPr lang="it-IT" dirty="0"/>
+                  <a:t>sensitivity (</a:t>
+                </a:r>
+                <a14:m>
+                  <m:oMath xmlns:m="http://schemas.openxmlformats.org/officeDocument/2006/math">
+                    <m:acc>
+                      <m:accPr>
+                        <m:chr m:val="̅"/>
+                        <m:ctrlPr>
+                          <a:rPr lang="it-IT" i="1" cap="none">
+                            <a:latin typeface="Cambria Math" panose="02040503050406030204" pitchFamily="18" charset="0"/>
+                          </a:rPr>
+                        </m:ctrlPr>
+                      </m:accPr>
+                      <m:e>
+                        <m:sSub>
+                          <m:sSubPr>
+                            <m:ctrlPr>
+                              <a:rPr lang="it-IT" i="1" cap="none">
+                                <a:latin typeface="Cambria Math" panose="02040503050406030204" pitchFamily="18" charset="0"/>
+                              </a:rPr>
+                            </m:ctrlPr>
+                          </m:sSubPr>
+                          <m:e>
+                            <m:r>
+                              <a:rPr lang="it-IT" i="1" cap="none">
+                                <a:latin typeface="Cambria Math" panose="02040503050406030204" pitchFamily="18" charset="0"/>
+                              </a:rPr>
+                              <m:t>𝝂</m:t>
+                            </m:r>
+                          </m:e>
+                          <m:sub>
+                            <m:r>
+                              <a:rPr lang="it-IT" i="1" cap="none">
+                                <a:latin typeface="Cambria Math" panose="02040503050406030204" pitchFamily="18" charset="0"/>
+                              </a:rPr>
+                              <m:t>𝝁</m:t>
+                            </m:r>
+                          </m:sub>
+                        </m:sSub>
+                      </m:e>
+                    </m:acc>
+                    <m:r>
+                      <a:rPr lang="it-IT" b="1" i="0" cap="none" smtClean="0">
+                        <a:latin typeface="Cambria Math" panose="02040503050406030204" pitchFamily="18" charset="0"/>
+                      </a:rPr>
+                      <m:t>+</m:t>
+                    </m:r>
+                    <m:sSub>
+                      <m:sSubPr>
+                        <m:ctrlPr>
+                          <a:rPr lang="it-IT" b="1" i="1" cap="none" smtClean="0">
+                            <a:latin typeface="Cambria Math" panose="02040503050406030204" pitchFamily="18" charset="0"/>
+                          </a:rPr>
+                        </m:ctrlPr>
+                      </m:sSubPr>
+                      <m:e>
+                        <m:r>
+                          <a:rPr lang="it-IT" b="1" i="1" cap="none" smtClean="0">
+                            <a:latin typeface="Cambria Math" panose="02040503050406030204" pitchFamily="18" charset="0"/>
+                          </a:rPr>
+                          <m:t>𝝂</m:t>
+                        </m:r>
+                      </m:e>
+                      <m:sub>
+                        <m:r>
+                          <a:rPr lang="it-IT" b="1" i="1" cap="none" smtClean="0">
+                            <a:latin typeface="Cambria Math" panose="02040503050406030204" pitchFamily="18" charset="0"/>
+                          </a:rPr>
+                          <m:t>𝝁</m:t>
+                        </m:r>
+                      </m:sub>
+                    </m:sSub>
+                  </m:oMath>
+                </a14:m>
+                <a:r>
+                  <a:rPr lang="it-IT" dirty="0"/>
+                  <a:t>) (3 </a:t>
+                </a:r>
+                <a:r>
+                  <a:rPr lang="it-IT" dirty="0" err="1"/>
+                  <a:t>yr</a:t>
+                </a:r>
+                <a:r>
+                  <a:rPr lang="it-IT" dirty="0"/>
+                  <a:t>)</a:t>
+                </a:r>
+              </a:p>
+            </p:txBody>
+          </p:sp>
+        </mc:Choice>
+        <mc:Fallback xmlns="">
+          <p:sp>
+            <p:nvSpPr>
+              <p:cNvPr id="2" name="Titolo 1">
+                <a:extLst>
+                  <a:ext uri="{FF2B5EF4-FFF2-40B4-BE49-F238E27FC236}">
+                    <a16:creationId xmlns:a16="http://schemas.microsoft.com/office/drawing/2014/main" id="{0670722B-3C39-174F-7DE6-B75BF040C467}"/>
+                  </a:ext>
+                </a:extLst>
+              </p:cNvPr>
+              <p:cNvSpPr>
+                <a:spLocks noGrp="1" noRot="1" noChangeAspect="1" noMove="1" noResize="1" noEditPoints="1" noAdjustHandles="1" noChangeArrowheads="1" noChangeShapeType="1" noTextEdit="1"/>
+              </p:cNvSpPr>
+              <p:nvPr>
+                <p:ph type="title"/>
+              </p:nvPr>
+            </p:nvSpPr>
+            <p:spPr>
+              <a:xfrm>
+                <a:off x="859245" y="707903"/>
+                <a:ext cx="9137012" cy="1280160"/>
+              </a:xfrm>
+              <a:blipFill>
+                <a:blip r:embed="rId2"/>
+                <a:stretch>
+                  <a:fillRect l="-3402" b="-20000"/>
+                </a:stretch>
+              </a:blipFill>
+            </p:spPr>
+            <p:txBody>
+              <a:bodyPr/>
+              <a:lstStyle/>
+              <a:p>
+                <a:r>
+                  <a:rPr lang="it-IT">
+                    <a:noFill/>
+                  </a:rPr>
+                  <a:t> </a:t>
+                </a:r>
+              </a:p>
+            </p:txBody>
+          </p:sp>
+        </mc:Fallback>
+      </mc:AlternateContent>
+      <p:sp>
+        <p:nvSpPr>
+          <p:cNvPr id="3" name="CasellaDiTesto 2">
+            <a:extLst>
+              <a:ext uri="{FF2B5EF4-FFF2-40B4-BE49-F238E27FC236}">
+                <a16:creationId xmlns:a16="http://schemas.microsoft.com/office/drawing/2014/main" id="{76CEF080-0E01-CF67-FF11-511A930A1238}"/>
+              </a:ext>
+            </a:extLst>
+          </p:cNvPr>
+          <p:cNvSpPr txBox="1"/>
+          <p:nvPr/>
+        </p:nvSpPr>
+        <p:spPr>
+          <a:xfrm>
+            <a:off x="1607127" y="3768437"/>
+            <a:ext cx="2216727" cy="369332"/>
+          </a:xfrm>
+          <a:prstGeom prst="rect">
+            <a:avLst/>
+          </a:prstGeom>
+          <a:noFill/>
+        </p:spPr>
+        <p:txBody>
+          <a:bodyPr wrap="square" rtlCol="0">
+            <a:spAutoFit/>
+          </a:bodyPr>
+          <a:lstStyle/>
+          <a:p>
+            <a:r>
+              <a:rPr lang="it-IT" dirty="0">
+                <a:solidFill>
+                  <a:schemeClr val="bg1">
+                    <a:lumMod val="75000"/>
+                  </a:schemeClr>
+                </a:solidFill>
+              </a:rPr>
+              <a:t>Preliminary </a:t>
+            </a:r>
+            <a:r>
+              <a:rPr lang="it-IT" dirty="0" err="1">
+                <a:solidFill>
+                  <a:schemeClr val="bg1">
+                    <a:lumMod val="75000"/>
+                  </a:schemeClr>
+                </a:solidFill>
+              </a:rPr>
+              <a:t>results</a:t>
+            </a:r>
+            <a:endParaRPr lang="it-IT" dirty="0">
+              <a:solidFill>
+                <a:schemeClr val="bg1">
+                  <a:lumMod val="75000"/>
+                </a:schemeClr>
+              </a:solidFill>
+            </a:endParaRPr>
+          </a:p>
+        </p:txBody>
+      </p:sp>
+      <p:sp>
+        <p:nvSpPr>
+          <p:cNvPr id="7" name="Segnaposto contenuto 6">
+            <a:extLst>
+              <a:ext uri="{FF2B5EF4-FFF2-40B4-BE49-F238E27FC236}">
+                <a16:creationId xmlns:a16="http://schemas.microsoft.com/office/drawing/2014/main" id="{169B0D88-0580-B4B0-D836-1072D2171C38}"/>
+              </a:ext>
+            </a:extLst>
+          </p:cNvPr>
+          <p:cNvSpPr>
+            <a:spLocks noGrp="1"/>
+          </p:cNvSpPr>
+          <p:nvPr>
+            <p:ph sz="half" idx="2"/>
+          </p:nvPr>
+        </p:nvSpPr>
+        <p:spPr>
+          <a:xfrm>
+            <a:off x="848544" y="2293872"/>
+            <a:ext cx="5810339" cy="498887"/>
+          </a:xfrm>
+        </p:spPr>
+        <p:txBody>
+          <a:bodyPr/>
+          <a:lstStyle/>
+          <a:p>
+            <a:r>
+              <a:rPr lang="it-IT" dirty="0"/>
+              <a:t>Sn IIP model by </a:t>
+            </a:r>
+            <a:r>
+              <a:rPr lang="it-IT" dirty="0" err="1"/>
+              <a:t>Murase</a:t>
+            </a:r>
+            <a:r>
+              <a:rPr lang="it-IT" dirty="0"/>
+              <a:t>, sources </a:t>
+            </a:r>
+            <a:r>
+              <a:rPr lang="it-IT" dirty="0" err="1"/>
+              <a:t>distance</a:t>
+            </a:r>
+            <a:r>
+              <a:rPr lang="it-IT" dirty="0"/>
+              <a:t> d=1Mpc, </a:t>
+            </a:r>
+            <a:r>
+              <a:rPr lang="it-IT" dirty="0" err="1"/>
+              <a:t>numu+anumu</a:t>
+            </a:r>
+            <a:endParaRPr lang="it-IT" dirty="0"/>
+          </a:p>
+        </p:txBody>
+      </p:sp>
+      <p:pic>
+        <p:nvPicPr>
+          <p:cNvPr id="11" name="Immagine 10">
+            <a:extLst>
+              <a:ext uri="{FF2B5EF4-FFF2-40B4-BE49-F238E27FC236}">
+                <a16:creationId xmlns:a16="http://schemas.microsoft.com/office/drawing/2014/main" id="{18098DC6-AB1A-D5CA-CECE-665F9BE5C5C1}"/>
+              </a:ext>
+            </a:extLst>
+          </p:cNvPr>
+          <p:cNvPicPr>
+            <a:picLocks noChangeAspect="1"/>
+          </p:cNvPicPr>
+          <p:nvPr/>
+        </p:nvPicPr>
+        <p:blipFill>
+          <a:blip r:embed="rId3"/>
+          <a:srcRect/>
+          <a:stretch/>
+        </p:blipFill>
+        <p:spPr>
+          <a:xfrm>
+            <a:off x="461497" y="3651646"/>
+            <a:ext cx="6276111" cy="2498451"/>
+          </a:xfrm>
+          <a:prstGeom prst="rect">
+            <a:avLst/>
+          </a:prstGeom>
+        </p:spPr>
+      </p:pic>
+      <p:pic>
+        <p:nvPicPr>
+          <p:cNvPr id="14" name="Immagine 13">
+            <a:extLst>
+              <a:ext uri="{FF2B5EF4-FFF2-40B4-BE49-F238E27FC236}">
+                <a16:creationId xmlns:a16="http://schemas.microsoft.com/office/drawing/2014/main" id="{EB5A541C-0745-7AA1-482C-CB076B1783D0}"/>
+              </a:ext>
+            </a:extLst>
+          </p:cNvPr>
+          <p:cNvPicPr>
+            <a:picLocks noChangeAspect="1"/>
+          </p:cNvPicPr>
+          <p:nvPr/>
+        </p:nvPicPr>
+        <p:blipFill>
+          <a:blip r:embed="rId4"/>
+          <a:srcRect/>
+          <a:stretch/>
+        </p:blipFill>
+        <p:spPr>
+          <a:xfrm>
+            <a:off x="6658883" y="2120848"/>
+            <a:ext cx="5454391" cy="4184505"/>
+          </a:xfrm>
+          <a:prstGeom prst="rect">
+            <a:avLst/>
+          </a:prstGeom>
+        </p:spPr>
+      </p:pic>
+      <p:pic>
+        <p:nvPicPr>
+          <p:cNvPr id="5" name="Immagine 4">
+            <a:extLst>
+              <a:ext uri="{FF2B5EF4-FFF2-40B4-BE49-F238E27FC236}">
+                <a16:creationId xmlns:a16="http://schemas.microsoft.com/office/drawing/2014/main" id="{CDFEA7E8-ECAD-B91F-2D49-81681245035A}"/>
+              </a:ext>
+            </a:extLst>
+          </p:cNvPr>
+          <p:cNvPicPr>
+            <a:picLocks noChangeAspect="1"/>
+          </p:cNvPicPr>
+          <p:nvPr/>
+        </p:nvPicPr>
+        <p:blipFill>
+          <a:blip r:embed="rId5"/>
+          <a:srcRect b="78047"/>
+          <a:stretch/>
+        </p:blipFill>
+        <p:spPr>
+          <a:xfrm>
+            <a:off x="461497" y="2965782"/>
+            <a:ext cx="6197386" cy="685864"/>
+          </a:xfrm>
+          <a:prstGeom prst="rect">
+            <a:avLst/>
+          </a:prstGeom>
+        </p:spPr>
+      </p:pic>
+    </p:spTree>
+    <p:extLst>
+      <p:ext uri="{BB962C8B-B14F-4D97-AF65-F5344CB8AC3E}">
+        <p14:creationId xmlns:p14="http://schemas.microsoft.com/office/powerpoint/2010/main" val="953235605"/>
+      </p:ext>
+    </p:extLst>
+  </p:cSld>
+  <p:clrMapOvr>
+    <a:masterClrMapping/>
+  </p:clrMapOvr>
+</p:sld>
+</file>
+
+<file path=ppt/slides/slide17.xml><?xml version="1.0" encoding="utf-8"?>
+<p:sld xmlns:a="http://schemas.openxmlformats.org/drawingml/2006/main" xmlns:r="http://schemas.openxmlformats.org/officeDocument/2006/relationships" xmlns:p="http://schemas.openxmlformats.org/presentationml/2006/main">
+  <p:cSld>
+    <p:spTree>
+      <p:nvGrpSpPr>
+        <p:cNvPr id="1" name=""/>
+        <p:cNvGrpSpPr/>
+        <p:nvPr/>
+      </p:nvGrpSpPr>
+      <p:grpSpPr>
+        <a:xfrm>
+          <a:off x="0" y="0"/>
+          <a:ext cx="0" cy="0"/>
+          <a:chOff x="0" y="0"/>
+          <a:chExt cx="0" cy="0"/>
+        </a:xfrm>
+      </p:grpSpPr>
+      <p:pic>
+        <p:nvPicPr>
+          <p:cNvPr id="41" name="Google Shape;172;p21">
+            <a:extLst>
+              <a:ext uri="{FF2B5EF4-FFF2-40B4-BE49-F238E27FC236}">
+                <a16:creationId xmlns:a16="http://schemas.microsoft.com/office/drawing/2014/main" id="{7AEDACFC-BEBF-3A0D-D880-EDA342131825}"/>
+              </a:ext>
+            </a:extLst>
+          </p:cNvPr>
+          <p:cNvPicPr preferRelativeResize="0">
+            <a:picLocks/>
+          </p:cNvPicPr>
+          <p:nvPr/>
+        </p:nvPicPr>
+        <p:blipFill>
+          <a:blip r:embed="rId2">
+            <a:alphaModFix/>
+          </a:blip>
+          <a:stretch>
+            <a:fillRect/>
+          </a:stretch>
+        </p:blipFill>
+        <p:spPr>
+          <a:xfrm>
+            <a:off x="6713398" y="19157"/>
+            <a:ext cx="4628800" cy="3428912"/>
+          </a:xfrm>
+          <a:prstGeom prst="rect">
+            <a:avLst/>
+          </a:prstGeom>
+          <a:noFill/>
+          <a:ln>
+            <a:noFill/>
+          </a:ln>
+        </p:spPr>
+      </p:pic>
+      <p:pic>
+        <p:nvPicPr>
+          <p:cNvPr id="10" name="Segnaposto contenuto 9">
+            <a:extLst>
+              <a:ext uri="{FF2B5EF4-FFF2-40B4-BE49-F238E27FC236}">
+                <a16:creationId xmlns:a16="http://schemas.microsoft.com/office/drawing/2014/main" id="{40A9EE2D-1AB5-2BEF-6982-D761192D878D}"/>
+              </a:ext>
+            </a:extLst>
+          </p:cNvPr>
+          <p:cNvPicPr>
+            <a:picLocks noGrp="1" noChangeAspect="1"/>
+          </p:cNvPicPr>
+          <p:nvPr>
+            <p:ph sz="quarter" idx="4"/>
+          </p:nvPr>
+        </p:nvPicPr>
+        <p:blipFill>
+          <a:blip r:embed="rId3"/>
+          <a:stretch>
+            <a:fillRect/>
+          </a:stretch>
+        </p:blipFill>
+        <p:spPr>
+          <a:xfrm>
+            <a:off x="1152420" y="494866"/>
+            <a:ext cx="4622047" cy="2058076"/>
+          </a:xfrm>
+          <a:ln w="38100">
+            <a:solidFill>
+              <a:schemeClr val="accent1"/>
+            </a:solidFill>
+          </a:ln>
+        </p:spPr>
+      </p:pic>
+      <p:pic>
+        <p:nvPicPr>
+          <p:cNvPr id="16" name="Immagine 15">
+            <a:extLst>
+              <a:ext uri="{FF2B5EF4-FFF2-40B4-BE49-F238E27FC236}">
+                <a16:creationId xmlns:a16="http://schemas.microsoft.com/office/drawing/2014/main" id="{08FE059E-B13F-EEC7-A153-4E56E50B5C75}"/>
+              </a:ext>
+            </a:extLst>
+          </p:cNvPr>
+          <p:cNvPicPr>
+            <a:picLocks noChangeAspect="1"/>
+          </p:cNvPicPr>
+          <p:nvPr/>
+        </p:nvPicPr>
+        <p:blipFill>
+          <a:blip r:embed="rId4"/>
+          <a:stretch>
+            <a:fillRect/>
+          </a:stretch>
+        </p:blipFill>
+        <p:spPr>
+          <a:xfrm>
+            <a:off x="192765" y="3609254"/>
+            <a:ext cx="6096851" cy="3010320"/>
+          </a:xfrm>
+          <a:prstGeom prst="rect">
+            <a:avLst/>
+          </a:prstGeom>
+        </p:spPr>
+      </p:pic>
+      <p:pic>
+        <p:nvPicPr>
+          <p:cNvPr id="18" name="Immagine 17">
+            <a:extLst>
+              <a:ext uri="{FF2B5EF4-FFF2-40B4-BE49-F238E27FC236}">
+                <a16:creationId xmlns:a16="http://schemas.microsoft.com/office/drawing/2014/main" id="{EC01FD35-3456-2014-C858-D2F29D8B1391}"/>
+              </a:ext>
+            </a:extLst>
+          </p:cNvPr>
+          <p:cNvPicPr>
+            <a:picLocks noChangeAspect="1"/>
+          </p:cNvPicPr>
+          <p:nvPr/>
+        </p:nvPicPr>
+        <p:blipFill>
+          <a:blip r:embed="rId5"/>
+          <a:stretch>
+            <a:fillRect/>
+          </a:stretch>
+        </p:blipFill>
+        <p:spPr>
+          <a:xfrm>
+            <a:off x="6289616" y="3609254"/>
+            <a:ext cx="5953956" cy="2991267"/>
+          </a:xfrm>
+          <a:prstGeom prst="rect">
+            <a:avLst/>
+          </a:prstGeom>
+        </p:spPr>
+      </p:pic>
+      <p:sp>
+        <p:nvSpPr>
+          <p:cNvPr id="27" name="CasellaDiTesto 26">
+            <a:extLst>
+              <a:ext uri="{FF2B5EF4-FFF2-40B4-BE49-F238E27FC236}">
+                <a16:creationId xmlns:a16="http://schemas.microsoft.com/office/drawing/2014/main" id="{A79CC821-0849-7589-6BF7-C615D97B99B7}"/>
+              </a:ext>
+            </a:extLst>
+          </p:cNvPr>
+          <p:cNvSpPr txBox="1"/>
+          <p:nvPr/>
+        </p:nvSpPr>
+        <p:spPr>
+          <a:xfrm>
+            <a:off x="1152420" y="3040599"/>
+            <a:ext cx="4622047" cy="369332"/>
+          </a:xfrm>
+          <a:prstGeom prst="rect">
+            <a:avLst/>
+          </a:prstGeom>
+          <a:noFill/>
+          <a:ln w="38100">
+            <a:solidFill>
+              <a:srgbClr val="976CFF"/>
+            </a:solidFill>
+          </a:ln>
+        </p:spPr>
+        <p:txBody>
+          <a:bodyPr wrap="square" rtlCol="0">
+            <a:spAutoFit/>
+          </a:bodyPr>
+          <a:lstStyle/>
+          <a:p>
+            <a:r>
+              <a:rPr lang="it-IT" dirty="0"/>
+              <a:t>First </a:t>
+            </a:r>
+            <a:r>
+              <a:rPr lang="it-IT" dirty="0" err="1"/>
+              <a:t>period</a:t>
+            </a:r>
+            <a:r>
+              <a:rPr lang="it-IT" dirty="0"/>
+              <a:t> IIP – time window </a:t>
+            </a:r>
+            <a:r>
+              <a:rPr lang="it-IT" dirty="0">
+                <a:latin typeface="Roboto" panose="02000000000000000000" pitchFamily="2" charset="0"/>
+                <a:ea typeface="Roboto" panose="02000000000000000000" pitchFamily="2" charset="0"/>
+                <a:cs typeface="Roboto" panose="02000000000000000000" pitchFamily="2" charset="0"/>
+              </a:rPr>
+              <a:t>≈ 6 days</a:t>
+            </a:r>
+            <a:endParaRPr lang="it-IT" dirty="0"/>
+          </a:p>
+        </p:txBody>
+      </p:sp>
+      <p:sp>
+        <p:nvSpPr>
+          <p:cNvPr id="29" name="CasellaDiTesto 28">
+            <a:extLst>
+              <a:ext uri="{FF2B5EF4-FFF2-40B4-BE49-F238E27FC236}">
+                <a16:creationId xmlns:a16="http://schemas.microsoft.com/office/drawing/2014/main" id="{F2186857-05FC-036A-266D-972D25E394EA}"/>
+              </a:ext>
+            </a:extLst>
+          </p:cNvPr>
+          <p:cNvSpPr txBox="1"/>
+          <p:nvPr/>
+        </p:nvSpPr>
+        <p:spPr>
+          <a:xfrm>
+            <a:off x="7464609" y="3263403"/>
+            <a:ext cx="4815191" cy="369332"/>
+          </a:xfrm>
+          <a:prstGeom prst="rect">
+            <a:avLst/>
+          </a:prstGeom>
+          <a:noFill/>
+          <a:ln w="38100">
+            <a:solidFill>
+              <a:srgbClr val="976CFF"/>
+            </a:solidFill>
+          </a:ln>
+        </p:spPr>
+        <p:txBody>
+          <a:bodyPr wrap="square" rtlCol="0">
+            <a:spAutoFit/>
+          </a:bodyPr>
+          <a:lstStyle/>
+          <a:p>
+            <a:r>
+              <a:rPr lang="it-IT" dirty="0"/>
+              <a:t>Second </a:t>
+            </a:r>
+            <a:r>
+              <a:rPr lang="it-IT" dirty="0" err="1"/>
+              <a:t>period</a:t>
+            </a:r>
+            <a:r>
+              <a:rPr lang="it-IT" dirty="0"/>
+              <a:t> IIP – time window </a:t>
+            </a:r>
+            <a:r>
+              <a:rPr lang="it-IT" dirty="0">
+                <a:latin typeface="Roboto" panose="02000000000000000000" pitchFamily="2" charset="0"/>
+                <a:ea typeface="Roboto" panose="02000000000000000000" pitchFamily="2" charset="0"/>
+                <a:cs typeface="Roboto" panose="02000000000000000000" pitchFamily="2" charset="0"/>
+              </a:rPr>
+              <a:t>≈ 3 </a:t>
+            </a:r>
+            <a:r>
+              <a:rPr lang="it-IT" dirty="0" err="1">
+                <a:latin typeface="Roboto" panose="02000000000000000000" pitchFamily="2" charset="0"/>
+                <a:ea typeface="Roboto" panose="02000000000000000000" pitchFamily="2" charset="0"/>
+                <a:cs typeface="Roboto" panose="02000000000000000000" pitchFamily="2" charset="0"/>
+              </a:rPr>
+              <a:t>years</a:t>
+            </a:r>
+            <a:endParaRPr lang="it-IT" dirty="0"/>
+          </a:p>
+        </p:txBody>
+      </p:sp>
+      <p:sp>
+        <p:nvSpPr>
+          <p:cNvPr id="42" name="Ovale 41">
+            <a:extLst>
+              <a:ext uri="{FF2B5EF4-FFF2-40B4-BE49-F238E27FC236}">
+                <a16:creationId xmlns:a16="http://schemas.microsoft.com/office/drawing/2014/main" id="{CEBB2D94-8AED-13C4-71B0-69D88684227C}"/>
+              </a:ext>
+            </a:extLst>
+          </p:cNvPr>
+          <p:cNvSpPr/>
+          <p:nvPr/>
+        </p:nvSpPr>
+        <p:spPr>
+          <a:xfrm rot="994157">
+            <a:off x="9317861" y="2070595"/>
+            <a:ext cx="2342500" cy="446567"/>
+          </a:xfrm>
+          <a:prstGeom prst="ellipse">
+            <a:avLst/>
+          </a:prstGeom>
+          <a:solidFill>
+            <a:srgbClr val="FF8112">
+              <a:alpha val="50000"/>
+            </a:srgbClr>
+          </a:solidFill>
+          <a:ln>
+            <a:noFill/>
+          </a:ln>
+        </p:spPr>
+        <p:style>
+          <a:lnRef idx="0">
+            <a:scrgbClr r="0" g="0" b="0"/>
+          </a:lnRef>
+          <a:fillRef idx="0">
+            <a:scrgbClr r="0" g="0" b="0"/>
+          </a:fillRef>
+          <a:effectRef idx="0">
+            <a:scrgbClr r="0" g="0" b="0"/>
+          </a:effectRef>
+          <a:fontRef idx="minor">
+            <a:schemeClr val="lt1"/>
+          </a:fontRef>
+        </p:style>
+        <p:txBody>
+          <a:bodyPr rtlCol="0" anchor="ctr"/>
+          <a:lstStyle/>
+          <a:p>
+            <a:pPr algn="ctr"/>
+            <a:endParaRPr lang="it-IT" dirty="0"/>
+          </a:p>
+        </p:txBody>
+      </p:sp>
+      <p:sp>
+        <p:nvSpPr>
+          <p:cNvPr id="43" name="Ovale 42">
+            <a:extLst>
+              <a:ext uri="{FF2B5EF4-FFF2-40B4-BE49-F238E27FC236}">
+                <a16:creationId xmlns:a16="http://schemas.microsoft.com/office/drawing/2014/main" id="{5833B95C-0865-FD93-57F4-9D8AAB7ADA00}"/>
+              </a:ext>
+            </a:extLst>
+          </p:cNvPr>
+          <p:cNvSpPr/>
+          <p:nvPr/>
+        </p:nvSpPr>
+        <p:spPr>
+          <a:xfrm rot="238847">
+            <a:off x="8588870" y="790934"/>
+            <a:ext cx="1427903" cy="446567"/>
+          </a:xfrm>
+          <a:prstGeom prst="ellipse">
+            <a:avLst/>
+          </a:prstGeom>
+          <a:solidFill>
+            <a:srgbClr val="FF8112">
+              <a:alpha val="50000"/>
+            </a:srgbClr>
+          </a:solidFill>
+          <a:ln>
+            <a:noFill/>
+          </a:ln>
+        </p:spPr>
+        <p:style>
+          <a:lnRef idx="0">
+            <a:scrgbClr r="0" g="0" b="0"/>
+          </a:lnRef>
+          <a:fillRef idx="0">
+            <a:scrgbClr r="0" g="0" b="0"/>
+          </a:fillRef>
+          <a:effectRef idx="0">
+            <a:scrgbClr r="0" g="0" b="0"/>
+          </a:effectRef>
+          <a:fontRef idx="minor">
+            <a:schemeClr val="lt1"/>
+          </a:fontRef>
+        </p:style>
+        <p:txBody>
+          <a:bodyPr rtlCol="0" anchor="ctr"/>
+          <a:lstStyle/>
+          <a:p>
+            <a:pPr algn="ctr"/>
+            <a:endParaRPr lang="it-IT" dirty="0"/>
+          </a:p>
+        </p:txBody>
+      </p:sp>
+      <p:cxnSp>
+        <p:nvCxnSpPr>
+          <p:cNvPr id="45" name="Connettore curvo 44">
+            <a:extLst>
+              <a:ext uri="{FF2B5EF4-FFF2-40B4-BE49-F238E27FC236}">
+                <a16:creationId xmlns:a16="http://schemas.microsoft.com/office/drawing/2014/main" id="{FF713CBC-C2A7-EC67-F277-76E6858A8E78}"/>
+              </a:ext>
+            </a:extLst>
+          </p:cNvPr>
+          <p:cNvCxnSpPr>
+            <a:cxnSpLocks/>
+            <a:stCxn id="43" idx="2"/>
+          </p:cNvCxnSpPr>
+          <p:nvPr/>
+        </p:nvCxnSpPr>
+        <p:spPr>
+          <a:xfrm rot="10800000" flipV="1">
+            <a:off x="5509462" y="964653"/>
+            <a:ext cx="3081131" cy="2260607"/>
+          </a:xfrm>
+          <a:prstGeom prst="curvedConnector3">
+            <a:avLst/>
+          </a:prstGeom>
+          <a:ln w="28575">
+            <a:tailEnd type="triangle"/>
+          </a:ln>
+        </p:spPr>
+        <p:style>
+          <a:lnRef idx="1">
+            <a:schemeClr val="accent1"/>
+          </a:lnRef>
+          <a:fillRef idx="0">
+            <a:schemeClr val="accent1"/>
+          </a:fillRef>
+          <a:effectRef idx="0">
+            <a:schemeClr val="accent1"/>
+          </a:effectRef>
+          <a:fontRef idx="minor">
+            <a:schemeClr val="tx1"/>
+          </a:fontRef>
+        </p:style>
+      </p:cxnSp>
+      <p:cxnSp>
+        <p:nvCxnSpPr>
+          <p:cNvPr id="48" name="Connettore curvo 47">
+            <a:extLst>
+              <a:ext uri="{FF2B5EF4-FFF2-40B4-BE49-F238E27FC236}">
+                <a16:creationId xmlns:a16="http://schemas.microsoft.com/office/drawing/2014/main" id="{0A27917D-3EE7-4DE1-F1E3-330DF8986916}"/>
+              </a:ext>
+            </a:extLst>
+          </p:cNvPr>
+          <p:cNvCxnSpPr>
+            <a:cxnSpLocks/>
+            <a:stCxn id="42" idx="2"/>
+            <a:endCxn id="29" idx="0"/>
+          </p:cNvCxnSpPr>
+          <p:nvPr/>
+        </p:nvCxnSpPr>
+        <p:spPr>
+          <a:xfrm rot="10800000" flipH="1" flipV="1">
+            <a:off x="9366495" y="1959867"/>
+            <a:ext cx="505709" cy="1303535"/>
+          </a:xfrm>
+          <a:prstGeom prst="curvedConnector4">
+            <a:avLst>
+              <a:gd name="adj1" fmla="val -45204"/>
+              <a:gd name="adj2" fmla="val 71376"/>
+            </a:avLst>
+          </a:prstGeom>
+          <a:ln w="28575">
+            <a:tailEnd type="triangle"/>
+          </a:ln>
+        </p:spPr>
+        <p:style>
+          <a:lnRef idx="1">
+            <a:schemeClr val="accent1"/>
+          </a:lnRef>
+          <a:fillRef idx="0">
+            <a:schemeClr val="accent1"/>
+          </a:fillRef>
+          <a:effectRef idx="0">
+            <a:schemeClr val="accent1"/>
+          </a:effectRef>
+          <a:fontRef idx="minor">
+            <a:schemeClr val="tx1"/>
+          </a:fontRef>
+        </p:style>
+      </p:cxnSp>
+      <mc:AlternateContent xmlns:mc="http://schemas.openxmlformats.org/markup-compatibility/2006">
+        <mc:Choice xmlns:p14="http://schemas.microsoft.com/office/powerpoint/2010/main" Requires="p14">
+          <p:contentPart p14:bwMode="auto" r:id="rId6">
+            <p14:nvContentPartPr>
+              <p14:cNvPr id="56" name="Input penna 55">
+                <a:extLst>
+                  <a:ext uri="{FF2B5EF4-FFF2-40B4-BE49-F238E27FC236}">
+                    <a16:creationId xmlns:a16="http://schemas.microsoft.com/office/drawing/2014/main" id="{141356A3-3475-BC59-61D7-DDD367586374}"/>
+                  </a:ext>
+                </a:extLst>
+              </p14:cNvPr>
+              <p14:cNvContentPartPr/>
+              <p14:nvPr/>
+            </p14:nvContentPartPr>
+            <p14:xfrm>
+              <a:off x="4148678" y="2185200"/>
+              <a:ext cx="1419480" cy="360"/>
+            </p14:xfrm>
+          </p:contentPart>
+        </mc:Choice>
+        <mc:Fallback>
+          <p:pic>
+            <p:nvPicPr>
+              <p:cNvPr id="56" name="Input penna 55">
+                <a:extLst>
+                  <a:ext uri="{FF2B5EF4-FFF2-40B4-BE49-F238E27FC236}">
+                    <a16:creationId xmlns:a16="http://schemas.microsoft.com/office/drawing/2014/main" id="{141356A3-3475-BC59-61D7-DDD367586374}"/>
+                  </a:ext>
+                </a:extLst>
+              </p:cNvPr>
+              <p:cNvPicPr/>
+              <p:nvPr/>
+            </p:nvPicPr>
+            <p:blipFill>
+              <a:blip r:embed="rId7"/>
+              <a:stretch>
+                <a:fillRect/>
+              </a:stretch>
+            </p:blipFill>
+            <p:spPr>
+              <a:xfrm>
+                <a:off x="4142558" y="2179080"/>
+                <a:ext cx="1431720" cy="12600"/>
+              </a:xfrm>
+              <a:prstGeom prst="rect">
+                <a:avLst/>
+              </a:prstGeom>
+            </p:spPr>
+          </p:pic>
+        </mc:Fallback>
+      </mc:AlternateContent>
+      <mc:AlternateContent xmlns:mc="http://schemas.openxmlformats.org/markup-compatibility/2006">
+        <mc:Choice xmlns:p14="http://schemas.microsoft.com/office/powerpoint/2010/main" Requires="p14">
+          <p:contentPart p14:bwMode="auto" r:id="rId8">
+            <p14:nvContentPartPr>
+              <p14:cNvPr id="57" name="Input penna 56">
+                <a:extLst>
+                  <a:ext uri="{FF2B5EF4-FFF2-40B4-BE49-F238E27FC236}">
+                    <a16:creationId xmlns:a16="http://schemas.microsoft.com/office/drawing/2014/main" id="{6335E59E-E7F7-6DA5-8FB9-DC54DAD8A193}"/>
+                  </a:ext>
+                </a:extLst>
+              </p14:cNvPr>
+              <p14:cNvContentPartPr/>
+              <p14:nvPr/>
+            </p14:nvContentPartPr>
+            <p14:xfrm>
+              <a:off x="1269038" y="2362320"/>
+              <a:ext cx="4340880" cy="360"/>
+            </p14:xfrm>
+          </p:contentPart>
+        </mc:Choice>
+        <mc:Fallback>
+          <p:pic>
+            <p:nvPicPr>
+              <p:cNvPr id="57" name="Input penna 56">
+                <a:extLst>
+                  <a:ext uri="{FF2B5EF4-FFF2-40B4-BE49-F238E27FC236}">
+                    <a16:creationId xmlns:a16="http://schemas.microsoft.com/office/drawing/2014/main" id="{6335E59E-E7F7-6DA5-8FB9-DC54DAD8A193}"/>
+                  </a:ext>
+                </a:extLst>
+              </p:cNvPr>
+              <p:cNvPicPr/>
+              <p:nvPr/>
+            </p:nvPicPr>
+            <p:blipFill>
+              <a:blip r:embed="rId9"/>
+              <a:stretch>
+                <a:fillRect/>
+              </a:stretch>
+            </p:blipFill>
+            <p:spPr>
+              <a:xfrm>
+                <a:off x="1262918" y="2356200"/>
+                <a:ext cx="4353120" cy="12600"/>
+              </a:xfrm>
+              <a:prstGeom prst="rect">
+                <a:avLst/>
+              </a:prstGeom>
+            </p:spPr>
+          </p:pic>
+        </mc:Fallback>
+      </mc:AlternateContent>
+      <mc:AlternateContent xmlns:mc="http://schemas.openxmlformats.org/markup-compatibility/2006">
+        <mc:Choice xmlns:p14="http://schemas.microsoft.com/office/powerpoint/2010/main" Requires="p14">
+          <p:contentPart p14:bwMode="auto" r:id="rId10">
+            <p14:nvContentPartPr>
+              <p14:cNvPr id="58" name="Input penna 57">
+                <a:extLst>
+                  <a:ext uri="{FF2B5EF4-FFF2-40B4-BE49-F238E27FC236}">
+                    <a16:creationId xmlns:a16="http://schemas.microsoft.com/office/drawing/2014/main" id="{B906299E-89D1-8376-9501-79B06586CBB9}"/>
+                  </a:ext>
+                </a:extLst>
+              </p14:cNvPr>
+              <p14:cNvContentPartPr/>
+              <p14:nvPr/>
+            </p14:nvContentPartPr>
+            <p14:xfrm>
+              <a:off x="1255358" y="2567160"/>
+              <a:ext cx="3746520" cy="360"/>
+            </p14:xfrm>
+          </p:contentPart>
+        </mc:Choice>
+        <mc:Fallback>
+          <p:pic>
+            <p:nvPicPr>
+              <p:cNvPr id="58" name="Input penna 57">
+                <a:extLst>
+                  <a:ext uri="{FF2B5EF4-FFF2-40B4-BE49-F238E27FC236}">
+                    <a16:creationId xmlns:a16="http://schemas.microsoft.com/office/drawing/2014/main" id="{B906299E-89D1-8376-9501-79B06586CBB9}"/>
+                  </a:ext>
+                </a:extLst>
+              </p:cNvPr>
+              <p:cNvPicPr/>
+              <p:nvPr/>
+            </p:nvPicPr>
+            <p:blipFill>
+              <a:blip r:embed="rId11"/>
+              <a:stretch>
+                <a:fillRect/>
+              </a:stretch>
+            </p:blipFill>
+            <p:spPr>
+              <a:xfrm>
+                <a:off x="1249238" y="2561040"/>
+                <a:ext cx="3758760" cy="12600"/>
+              </a:xfrm>
+              <a:prstGeom prst="rect">
+                <a:avLst/>
+              </a:prstGeom>
+            </p:spPr>
+          </p:pic>
+        </mc:Fallback>
+      </mc:AlternateContent>
+    </p:spTree>
+    <p:extLst>
+      <p:ext uri="{BB962C8B-B14F-4D97-AF65-F5344CB8AC3E}">
+        <p14:creationId xmlns:p14="http://schemas.microsoft.com/office/powerpoint/2010/main" val="2367262981"/>
+      </p:ext>
+    </p:extLst>
+  </p:cSld>
+  <p:clrMapOvr>
+    <a:masterClrMapping/>
+  </p:clrMapOvr>
+</p:sld>
+</file>
+
+<file path=ppt/slides/slide18.xml><?xml version="1.0" encoding="utf-8"?>
+<p:sld xmlns:a="http://schemas.openxmlformats.org/drawingml/2006/main" xmlns:r="http://schemas.openxmlformats.org/officeDocument/2006/relationships" xmlns:p="http://schemas.openxmlformats.org/presentationml/2006/main">
+  <p:cSld>
+    <p:spTree>
+      <p:nvGrpSpPr>
+        <p:cNvPr id="1" name=""/>
+        <p:cNvGrpSpPr/>
+        <p:nvPr/>
+      </p:nvGrpSpPr>
+      <p:grpSpPr>
+        <a:xfrm>
+          <a:off x="0" y="0"/>
+          <a:ext cx="0" cy="0"/>
+          <a:chOff x="0" y="0"/>
+          <a:chExt cx="0" cy="0"/>
+        </a:xfrm>
+      </p:grpSpPr>
+      <p:sp>
+        <p:nvSpPr>
+          <p:cNvPr id="5" name="Titolo 4">
+            <a:extLst>
+              <a:ext uri="{FF2B5EF4-FFF2-40B4-BE49-F238E27FC236}">
                 <a16:creationId xmlns:a16="http://schemas.microsoft.com/office/drawing/2014/main" id="{0C836709-0EC4-BDD7-A403-A0BF93A40B0D}"/>
               </a:ext>
             </a:extLst>
@@ -16273,7 +18313,7 @@
 </p:sld>
 </file>
 
-<file path=ppt/slides/slide13.xml><?xml version="1.0" encoding="utf-8"?>
+<file path=ppt/slides/slide19.xml><?xml version="1.0" encoding="utf-8"?>
 <p:sld xmlns:a="http://schemas.openxmlformats.org/drawingml/2006/main" xmlns:r="http://schemas.openxmlformats.org/officeDocument/2006/relationships" xmlns:p="http://schemas.openxmlformats.org/presentationml/2006/main">
   <p:cSld>
     <p:spTree>
@@ -16536,7 +18576,163 @@
 </p:sld>
 </file>
 
-<file path=ppt/slides/slide14.xml><?xml version="1.0" encoding="utf-8"?>
+<file path=ppt/slides/slide2.xml><?xml version="1.0" encoding="utf-8"?>
+<p:sld xmlns:a="http://schemas.openxmlformats.org/drawingml/2006/main" xmlns:r="http://schemas.openxmlformats.org/officeDocument/2006/relationships" xmlns:p="http://schemas.openxmlformats.org/presentationml/2006/main">
+  <p:cSld>
+    <p:spTree>
+      <p:nvGrpSpPr>
+        <p:cNvPr id="1" name=""/>
+        <p:cNvGrpSpPr/>
+        <p:nvPr/>
+      </p:nvGrpSpPr>
+      <p:grpSpPr>
+        <a:xfrm>
+          <a:off x="0" y="0"/>
+          <a:ext cx="0" cy="0"/>
+          <a:chOff x="0" y="0"/>
+          <a:chExt cx="0" cy="0"/>
+        </a:xfrm>
+      </p:grpSpPr>
+      <p:sp>
+        <p:nvSpPr>
+          <p:cNvPr id="2" name="Titolo 1">
+            <a:extLst>
+              <a:ext uri="{FF2B5EF4-FFF2-40B4-BE49-F238E27FC236}">
+                <a16:creationId xmlns:a16="http://schemas.microsoft.com/office/drawing/2014/main" id="{9FF243DF-1FE9-01BE-435F-1729F4AB3DE4}"/>
+              </a:ext>
+            </a:extLst>
+          </p:cNvPr>
+          <p:cNvSpPr>
+            <a:spLocks noGrp="1"/>
+          </p:cNvSpPr>
+          <p:nvPr>
+            <p:ph type="title"/>
+          </p:nvPr>
+        </p:nvSpPr>
+        <p:spPr>
+          <a:xfrm>
+            <a:off x="4114800" y="640080"/>
+            <a:ext cx="7498080" cy="1280160"/>
+          </a:xfrm>
+        </p:spPr>
+        <p:txBody>
+          <a:bodyPr rtlCol="0" anchor="b">
+            <a:normAutofit/>
+          </a:bodyPr>
+          <a:lstStyle>
+            <a:defPPr>
+              <a:defRPr lang="it-IT"/>
+            </a:defPPr>
+          </a:lstStyle>
+          <a:p>
+            <a:pPr rtl="0"/>
+            <a:r>
+              <a:rPr lang="it-IT" dirty="0" err="1"/>
+              <a:t>What</a:t>
+            </a:r>
+            <a:r>
+              <a:rPr lang="it-IT" dirty="0"/>
+              <a:t> </a:t>
+            </a:r>
+            <a:r>
+              <a:rPr lang="it-IT" dirty="0" err="1"/>
+              <a:t>has</a:t>
+            </a:r>
+            <a:r>
+              <a:rPr lang="it-IT" dirty="0"/>
+              <a:t> </a:t>
+            </a:r>
+            <a:r>
+              <a:rPr lang="it-IT" dirty="0" err="1"/>
+              <a:t>been</a:t>
+            </a:r>
+            <a:r>
+              <a:rPr lang="it-IT" dirty="0"/>
+              <a:t> </a:t>
+            </a:r>
+            <a:r>
+              <a:rPr lang="it-IT" dirty="0" err="1"/>
+              <a:t>done</a:t>
+            </a:r>
+            <a:r>
+              <a:rPr lang="it-IT" dirty="0"/>
+              <a:t>?</a:t>
+            </a:r>
+          </a:p>
+        </p:txBody>
+      </p:sp>
+      <p:graphicFrame>
+        <p:nvGraphicFramePr>
+          <p:cNvPr id="7" name="Segnaposto testo 3">
+            <a:extLst>
+              <a:ext uri="{FF2B5EF4-FFF2-40B4-BE49-F238E27FC236}">
+                <a16:creationId xmlns:a16="http://schemas.microsoft.com/office/drawing/2014/main" id="{B3B361F1-ED86-3796-BB3F-13776A4BC192}"/>
+              </a:ext>
+            </a:extLst>
+          </p:cNvPr>
+          <p:cNvGraphicFramePr/>
+          <p:nvPr>
+            <p:extLst>
+              <p:ext uri="{D42A27DB-BD31-4B8C-83A1-F6EECF244321}">
+                <p14:modId xmlns:p14="http://schemas.microsoft.com/office/powerpoint/2010/main" val="1150448291"/>
+              </p:ext>
+            </p:extLst>
+          </p:nvPr>
+        </p:nvGraphicFramePr>
+        <p:xfrm>
+          <a:off x="4114800" y="2194560"/>
+          <a:ext cx="7498080" cy="4023360"/>
+        </p:xfrm>
+        <a:graphic>
+          <a:graphicData uri="http://schemas.openxmlformats.org/drawingml/2006/diagram">
+            <dgm:relIds xmlns:dgm="http://schemas.openxmlformats.org/drawingml/2006/diagram" xmlns:r="http://schemas.openxmlformats.org/officeDocument/2006/relationships" r:dm="rId3" r:lo="rId4" r:qs="rId5" r:cs="rId6"/>
+          </a:graphicData>
+        </a:graphic>
+      </p:graphicFrame>
+      <p:pic>
+        <p:nvPicPr>
+          <p:cNvPr id="9" name="Segnaposto immagine 8" descr="Immagine che contiene cerchio, emblema, simbolo, arte&#10;&#10;Il contenuto generato dall'IA potrebbe non essere corretto.">
+            <a:extLst>
+              <a:ext uri="{FF2B5EF4-FFF2-40B4-BE49-F238E27FC236}">
+                <a16:creationId xmlns:a16="http://schemas.microsoft.com/office/drawing/2014/main" id="{77F56D1C-E323-8A1E-B112-F3A64E90CAD2}"/>
+              </a:ext>
+            </a:extLst>
+          </p:cNvPr>
+          <p:cNvPicPr>
+            <a:picLocks noGrp="1" noChangeAspect="1"/>
+          </p:cNvPicPr>
+          <p:nvPr>
+            <p:ph type="pic" sz="quarter" idx="13"/>
+          </p:nvPr>
+        </p:nvPicPr>
+        <p:blipFill>
+          <a:blip r:embed="rId8"/>
+          <a:srcRect l="192" r="192"/>
+          <a:stretch>
+            <a:fillRect/>
+          </a:stretch>
+        </p:blipFill>
+        <p:spPr>
+          <a:xfrm>
+            <a:off x="1143444" y="640080"/>
+            <a:ext cx="1498156" cy="1498158"/>
+          </a:xfrm>
+        </p:spPr>
+      </p:pic>
+    </p:spTree>
+    <p:extLst>
+      <p:ext uri="{BB962C8B-B14F-4D97-AF65-F5344CB8AC3E}">
+        <p14:creationId xmlns:p14="http://schemas.microsoft.com/office/powerpoint/2010/main" val="3037812869"/>
+      </p:ext>
+    </p:extLst>
+  </p:cSld>
+  <p:clrMapOvr>
+    <a:masterClrMapping/>
+  </p:clrMapOvr>
+</p:sld>
+</file>
+
+<file path=ppt/slides/slide20.xml><?xml version="1.0" encoding="utf-8"?>
 <p:sld xmlns:a="http://schemas.openxmlformats.org/drawingml/2006/main" xmlns:r="http://schemas.openxmlformats.org/officeDocument/2006/relationships" xmlns:p="http://schemas.openxmlformats.org/presentationml/2006/main">
   <p:cSld>
     <p:spTree>
@@ -17190,7 +19386,7 @@
 </p:sld>
 </file>
 
-<file path=ppt/slides/slide15.xml><?xml version="1.0" encoding="utf-8"?>
+<file path=ppt/slides/slide21.xml><?xml version="1.0" encoding="utf-8"?>
 <p:sld xmlns:a="http://schemas.openxmlformats.org/drawingml/2006/main" xmlns:r="http://schemas.openxmlformats.org/officeDocument/2006/relationships" xmlns:p="http://schemas.openxmlformats.org/presentationml/2006/main">
   <p:cSld>
     <p:spTree>
@@ -18404,7 +20600,7 @@
 </p:sld>
 </file>
 
-<file path=ppt/slides/slide16.xml><?xml version="1.0" encoding="utf-8"?>
+<file path=ppt/slides/slide22.xml><?xml version="1.0" encoding="utf-8"?>
 <p:sld xmlns:a="http://schemas.openxmlformats.org/drawingml/2006/main" xmlns:r="http://schemas.openxmlformats.org/officeDocument/2006/relationships" xmlns:p="http://schemas.openxmlformats.org/presentationml/2006/main">
   <p:cSld>
     <p:spTree>
@@ -18601,7 +20797,7 @@
 </p:sld>
 </file>
 
-<file path=ppt/slides/slide17.xml><?xml version="1.0" encoding="utf-8"?>
+<file path=ppt/slides/slide23.xml><?xml version="1.0" encoding="utf-8"?>
 <p:sld xmlns:a="http://schemas.openxmlformats.org/drawingml/2006/main" xmlns:r="http://schemas.openxmlformats.org/officeDocument/2006/relationships" xmlns:p="http://schemas.openxmlformats.org/presentationml/2006/main">
   <p:cSld>
     <p:spTree>
@@ -18922,7 +21118,7 @@
 </p:sld>
 </file>
 
-<file path=ppt/slides/slide18.xml><?xml version="1.0" encoding="utf-8"?>
+<file path=ppt/slides/slide24.xml><?xml version="1.0" encoding="utf-8"?>
 <p:sld xmlns:a="http://schemas.openxmlformats.org/drawingml/2006/main" xmlns:r="http://schemas.openxmlformats.org/officeDocument/2006/relationships" xmlns:p="http://schemas.openxmlformats.org/presentationml/2006/main">
   <p:cSld>
     <p:spTree>
@@ -19302,7 +21498,7 @@
 </p:sld>
 </file>
 
-<file path=ppt/slides/slide19.xml><?xml version="1.0" encoding="utf-8"?>
+<file path=ppt/slides/slide25.xml><?xml version="1.0" encoding="utf-8"?>
 <p:sld xmlns:a="http://schemas.openxmlformats.org/drawingml/2006/main" xmlns:r="http://schemas.openxmlformats.org/officeDocument/2006/relationships" xmlns:p="http://schemas.openxmlformats.org/presentationml/2006/main">
   <p:cSld>
     <p:spTree>
@@ -19683,163 +21879,7 @@
 </p:sld>
 </file>
 
-<file path=ppt/slides/slide2.xml><?xml version="1.0" encoding="utf-8"?>
-<p:sld xmlns:a="http://schemas.openxmlformats.org/drawingml/2006/main" xmlns:r="http://schemas.openxmlformats.org/officeDocument/2006/relationships" xmlns:p="http://schemas.openxmlformats.org/presentationml/2006/main">
-  <p:cSld>
-    <p:spTree>
-      <p:nvGrpSpPr>
-        <p:cNvPr id="1" name=""/>
-        <p:cNvGrpSpPr/>
-        <p:nvPr/>
-      </p:nvGrpSpPr>
-      <p:grpSpPr>
-        <a:xfrm>
-          <a:off x="0" y="0"/>
-          <a:ext cx="0" cy="0"/>
-          <a:chOff x="0" y="0"/>
-          <a:chExt cx="0" cy="0"/>
-        </a:xfrm>
-      </p:grpSpPr>
-      <p:sp>
-        <p:nvSpPr>
-          <p:cNvPr id="2" name="Titolo 1">
-            <a:extLst>
-              <a:ext uri="{FF2B5EF4-FFF2-40B4-BE49-F238E27FC236}">
-                <a16:creationId xmlns:a16="http://schemas.microsoft.com/office/drawing/2014/main" id="{9FF243DF-1FE9-01BE-435F-1729F4AB3DE4}"/>
-              </a:ext>
-            </a:extLst>
-          </p:cNvPr>
-          <p:cNvSpPr>
-            <a:spLocks noGrp="1"/>
-          </p:cNvSpPr>
-          <p:nvPr>
-            <p:ph type="title"/>
-          </p:nvPr>
-        </p:nvSpPr>
-        <p:spPr>
-          <a:xfrm>
-            <a:off x="4114800" y="640080"/>
-            <a:ext cx="7498080" cy="1280160"/>
-          </a:xfrm>
-        </p:spPr>
-        <p:txBody>
-          <a:bodyPr rtlCol="0" anchor="b">
-            <a:normAutofit/>
-          </a:bodyPr>
-          <a:lstStyle>
-            <a:defPPr>
-              <a:defRPr lang="it-IT"/>
-            </a:defPPr>
-          </a:lstStyle>
-          <a:p>
-            <a:pPr rtl="0"/>
-            <a:r>
-              <a:rPr lang="it-IT" dirty="0" err="1"/>
-              <a:t>What</a:t>
-            </a:r>
-            <a:r>
-              <a:rPr lang="it-IT" dirty="0"/>
-              <a:t> </a:t>
-            </a:r>
-            <a:r>
-              <a:rPr lang="it-IT" dirty="0" err="1"/>
-              <a:t>has</a:t>
-            </a:r>
-            <a:r>
-              <a:rPr lang="it-IT" dirty="0"/>
-              <a:t> </a:t>
-            </a:r>
-            <a:r>
-              <a:rPr lang="it-IT" dirty="0" err="1"/>
-              <a:t>been</a:t>
-            </a:r>
-            <a:r>
-              <a:rPr lang="it-IT" dirty="0"/>
-              <a:t> </a:t>
-            </a:r>
-            <a:r>
-              <a:rPr lang="it-IT" dirty="0" err="1"/>
-              <a:t>done</a:t>
-            </a:r>
-            <a:r>
-              <a:rPr lang="it-IT" dirty="0"/>
-              <a:t>?</a:t>
-            </a:r>
-          </a:p>
-        </p:txBody>
-      </p:sp>
-      <p:graphicFrame>
-        <p:nvGraphicFramePr>
-          <p:cNvPr id="7" name="Segnaposto testo 3">
-            <a:extLst>
-              <a:ext uri="{FF2B5EF4-FFF2-40B4-BE49-F238E27FC236}">
-                <a16:creationId xmlns:a16="http://schemas.microsoft.com/office/drawing/2014/main" id="{B3B361F1-ED86-3796-BB3F-13776A4BC192}"/>
-              </a:ext>
-            </a:extLst>
-          </p:cNvPr>
-          <p:cNvGraphicFramePr/>
-          <p:nvPr>
-            <p:extLst>
-              <p:ext uri="{D42A27DB-BD31-4B8C-83A1-F6EECF244321}">
-                <p14:modId xmlns:p14="http://schemas.microsoft.com/office/powerpoint/2010/main" val="1150448291"/>
-              </p:ext>
-            </p:extLst>
-          </p:nvPr>
-        </p:nvGraphicFramePr>
-        <p:xfrm>
-          <a:off x="4114800" y="2194560"/>
-          <a:ext cx="7498080" cy="4023360"/>
-        </p:xfrm>
-        <a:graphic>
-          <a:graphicData uri="http://schemas.openxmlformats.org/drawingml/2006/diagram">
-            <dgm:relIds xmlns:dgm="http://schemas.openxmlformats.org/drawingml/2006/diagram" xmlns:r="http://schemas.openxmlformats.org/officeDocument/2006/relationships" r:dm="rId3" r:lo="rId4" r:qs="rId5" r:cs="rId6"/>
-          </a:graphicData>
-        </a:graphic>
-      </p:graphicFrame>
-      <p:pic>
-        <p:nvPicPr>
-          <p:cNvPr id="9" name="Segnaposto immagine 8" descr="Immagine che contiene cerchio, emblema, simbolo, arte&#10;&#10;Il contenuto generato dall'IA potrebbe non essere corretto.">
-            <a:extLst>
-              <a:ext uri="{FF2B5EF4-FFF2-40B4-BE49-F238E27FC236}">
-                <a16:creationId xmlns:a16="http://schemas.microsoft.com/office/drawing/2014/main" id="{77F56D1C-E323-8A1E-B112-F3A64E90CAD2}"/>
-              </a:ext>
-            </a:extLst>
-          </p:cNvPr>
-          <p:cNvPicPr>
-            <a:picLocks noGrp="1" noChangeAspect="1"/>
-          </p:cNvPicPr>
-          <p:nvPr>
-            <p:ph type="pic" sz="quarter" idx="13"/>
-          </p:nvPr>
-        </p:nvPicPr>
-        <p:blipFill>
-          <a:blip r:embed="rId8"/>
-          <a:srcRect l="192" r="192"/>
-          <a:stretch>
-            <a:fillRect/>
-          </a:stretch>
-        </p:blipFill>
-        <p:spPr>
-          <a:xfrm>
-            <a:off x="1143444" y="640080"/>
-            <a:ext cx="1498156" cy="1498158"/>
-          </a:xfrm>
-        </p:spPr>
-      </p:pic>
-    </p:spTree>
-    <p:extLst>
-      <p:ext uri="{BB962C8B-B14F-4D97-AF65-F5344CB8AC3E}">
-        <p14:creationId xmlns:p14="http://schemas.microsoft.com/office/powerpoint/2010/main" val="3037812869"/>
-      </p:ext>
-    </p:extLst>
-  </p:cSld>
-  <p:clrMapOvr>
-    <a:masterClrMapping/>
-  </p:clrMapOvr>
-</p:sld>
-</file>
-
-<file path=ppt/slides/slide20.xml><?xml version="1.0" encoding="utf-8"?>
+<file path=ppt/slides/slide26.xml><?xml version="1.0" encoding="utf-8"?>
 <p:sld xmlns:a="http://schemas.openxmlformats.org/drawingml/2006/main" xmlns:r="http://schemas.openxmlformats.org/officeDocument/2006/relationships" xmlns:p="http://schemas.openxmlformats.org/presentationml/2006/main">
   <p:cSld>
     <p:spTree>
@@ -20219,7 +22259,7 @@
 </p:sld>
 </file>
 
-<file path=ppt/slides/slide21.xml><?xml version="1.0" encoding="utf-8"?>
+<file path=ppt/slides/slide27.xml><?xml version="1.0" encoding="utf-8"?>
 <p:sld xmlns:a="http://schemas.openxmlformats.org/drawingml/2006/main" xmlns:r="http://schemas.openxmlformats.org/officeDocument/2006/relationships" xmlns:p="http://schemas.openxmlformats.org/presentationml/2006/main">
   <p:cSld>
     <p:spTree>
@@ -20713,7 +22753,7 @@
 </p:sld>
 </file>
 
-<file path=ppt/slides/slide22.xml><?xml version="1.0" encoding="utf-8"?>
+<file path=ppt/slides/slide28.xml><?xml version="1.0" encoding="utf-8"?>
 <p:sld xmlns:a="http://schemas.openxmlformats.org/drawingml/2006/main" xmlns:r="http://schemas.openxmlformats.org/officeDocument/2006/relationships" xmlns:p="http://schemas.openxmlformats.org/presentationml/2006/main">
   <p:cSld>
     <p:spTree>
@@ -21147,7 +23187,7 @@
 </p:sld>
 </file>
 
-<file path=ppt/slides/slide23.xml><?xml version="1.0" encoding="utf-8"?>
+<file path=ppt/slides/slide29.xml><?xml version="1.0" encoding="utf-8"?>
 <p:sld xmlns:a="http://schemas.openxmlformats.org/drawingml/2006/main" xmlns:r="http://schemas.openxmlformats.org/officeDocument/2006/relationships" xmlns:p="http://schemas.openxmlformats.org/presentationml/2006/main">
   <p:cSld>
     <p:spTree>
@@ -21729,6 +23769,376 @@
     <p:extLst>
       <p:ext uri="{BB962C8B-B14F-4D97-AF65-F5344CB8AC3E}">
         <p14:creationId xmlns:p14="http://schemas.microsoft.com/office/powerpoint/2010/main" val="325799728"/>
+      </p:ext>
+    </p:extLst>
+  </p:cSld>
+  <p:clrMapOvr>
+    <a:masterClrMapping/>
+  </p:clrMapOvr>
+</p:sld>
+</file>
+
+<file path=ppt/slides/slide30.xml><?xml version="1.0" encoding="utf-8"?>
+<p:sld xmlns:a="http://schemas.openxmlformats.org/drawingml/2006/main" xmlns:r="http://schemas.openxmlformats.org/officeDocument/2006/relationships" xmlns:p="http://schemas.openxmlformats.org/presentationml/2006/main">
+  <p:cSld>
+    <p:spTree>
+      <p:nvGrpSpPr>
+        <p:cNvPr id="1" name="">
+          <a:extLst>
+            <a:ext uri="{FF2B5EF4-FFF2-40B4-BE49-F238E27FC236}">
+              <a16:creationId xmlns:a16="http://schemas.microsoft.com/office/drawing/2014/main" id="{EC5CD721-8F13-32C2-EF9C-E973EFB60882}"/>
+            </a:ext>
+          </a:extLst>
+        </p:cNvPr>
+        <p:cNvGrpSpPr/>
+        <p:nvPr/>
+      </p:nvGrpSpPr>
+      <p:grpSpPr>
+        <a:xfrm>
+          <a:off x="0" y="0"/>
+          <a:ext cx="0" cy="0"/>
+          <a:chOff x="0" y="0"/>
+          <a:chExt cx="0" cy="0"/>
+        </a:xfrm>
+      </p:grpSpPr>
+      <mc:AlternateContent xmlns:mc="http://schemas.openxmlformats.org/markup-compatibility/2006" xmlns:a14="http://schemas.microsoft.com/office/drawing/2010/main">
+        <mc:Choice Requires="a14">
+          <p:sp>
+            <p:nvSpPr>
+              <p:cNvPr id="2" name="Titolo 1">
+                <a:extLst>
+                  <a:ext uri="{FF2B5EF4-FFF2-40B4-BE49-F238E27FC236}">
+                    <a16:creationId xmlns:a16="http://schemas.microsoft.com/office/drawing/2014/main" id="{F2F8D3A9-A3A9-64D5-0D33-5706FDC60374}"/>
+                  </a:ext>
+                </a:extLst>
+              </p:cNvPr>
+              <p:cNvSpPr>
+                <a:spLocks noGrp="1"/>
+              </p:cNvSpPr>
+              <p:nvPr>
+                <p:ph type="title"/>
+              </p:nvPr>
+            </p:nvSpPr>
+            <p:spPr>
+              <a:xfrm>
+                <a:off x="859245" y="707903"/>
+                <a:ext cx="9137012" cy="1280160"/>
+              </a:xfrm>
+            </p:spPr>
+            <p:txBody>
+              <a:bodyPr/>
+              <a:lstStyle/>
+              <a:p>
+                <a:r>
+                  <a:rPr lang="it-IT" dirty="0"/>
+                  <a:t>sensitivity (</a:t>
+                </a:r>
+                <a14:m>
+                  <m:oMath xmlns:m="http://schemas.openxmlformats.org/officeDocument/2006/math">
+                    <m:acc>
+                      <m:accPr>
+                        <m:chr m:val="̅"/>
+                        <m:ctrlPr>
+                          <a:rPr lang="it-IT" i="1" cap="none">
+                            <a:latin typeface="Cambria Math" panose="02040503050406030204" pitchFamily="18" charset="0"/>
+                          </a:rPr>
+                        </m:ctrlPr>
+                      </m:accPr>
+                      <m:e>
+                        <m:sSub>
+                          <m:sSubPr>
+                            <m:ctrlPr>
+                              <a:rPr lang="it-IT" i="1" cap="none">
+                                <a:latin typeface="Cambria Math" panose="02040503050406030204" pitchFamily="18" charset="0"/>
+                              </a:rPr>
+                            </m:ctrlPr>
+                          </m:sSubPr>
+                          <m:e>
+                            <m:r>
+                              <a:rPr lang="it-IT" i="1" cap="none">
+                                <a:latin typeface="Cambria Math" panose="02040503050406030204" pitchFamily="18" charset="0"/>
+                              </a:rPr>
+                              <m:t>𝝂</m:t>
+                            </m:r>
+                          </m:e>
+                          <m:sub>
+                            <m:r>
+                              <a:rPr lang="it-IT" i="1" cap="none">
+                                <a:latin typeface="Cambria Math" panose="02040503050406030204" pitchFamily="18" charset="0"/>
+                              </a:rPr>
+                              <m:t>𝝁</m:t>
+                            </m:r>
+                          </m:sub>
+                        </m:sSub>
+                      </m:e>
+                    </m:acc>
+                    <m:r>
+                      <a:rPr lang="it-IT" b="1" i="0" cap="none" smtClean="0">
+                        <a:latin typeface="Cambria Math" panose="02040503050406030204" pitchFamily="18" charset="0"/>
+                      </a:rPr>
+                      <m:t>+</m:t>
+                    </m:r>
+                    <m:sSub>
+                      <m:sSubPr>
+                        <m:ctrlPr>
+                          <a:rPr lang="it-IT" b="1" i="1" cap="none" smtClean="0">
+                            <a:latin typeface="Cambria Math" panose="02040503050406030204" pitchFamily="18" charset="0"/>
+                          </a:rPr>
+                        </m:ctrlPr>
+                      </m:sSubPr>
+                      <m:e>
+                        <m:r>
+                          <a:rPr lang="it-IT" b="1" i="1" cap="none" smtClean="0">
+                            <a:latin typeface="Cambria Math" panose="02040503050406030204" pitchFamily="18" charset="0"/>
+                          </a:rPr>
+                          <m:t>𝝂</m:t>
+                        </m:r>
+                      </m:e>
+                      <m:sub>
+                        <m:r>
+                          <a:rPr lang="it-IT" b="1" i="1" cap="none" smtClean="0">
+                            <a:latin typeface="Cambria Math" panose="02040503050406030204" pitchFamily="18" charset="0"/>
+                          </a:rPr>
+                          <m:t>𝝁</m:t>
+                        </m:r>
+                      </m:sub>
+                    </m:sSub>
+                  </m:oMath>
+                </a14:m>
+                <a:r>
+                  <a:rPr lang="it-IT" dirty="0"/>
+                  <a:t>) (1 </a:t>
+                </a:r>
+                <a:r>
+                  <a:rPr lang="it-IT" dirty="0" err="1"/>
+                  <a:t>yr</a:t>
+                </a:r>
+                <a:r>
+                  <a:rPr lang="it-IT" dirty="0"/>
+                  <a:t>)</a:t>
+                </a:r>
+              </a:p>
+            </p:txBody>
+          </p:sp>
+        </mc:Choice>
+        <mc:Fallback xmlns="">
+          <p:sp>
+            <p:nvSpPr>
+              <p:cNvPr id="2" name="Titolo 1">
+                <a:extLst>
+                  <a:ext uri="{FF2B5EF4-FFF2-40B4-BE49-F238E27FC236}">
+                    <a16:creationId xmlns:a16="http://schemas.microsoft.com/office/drawing/2014/main" id="{F2F8D3A9-A3A9-64D5-0D33-5706FDC60374}"/>
+                  </a:ext>
+                </a:extLst>
+              </p:cNvPr>
+              <p:cNvSpPr>
+                <a:spLocks noGrp="1" noRot="1" noChangeAspect="1" noMove="1" noResize="1" noEditPoints="1" noAdjustHandles="1" noChangeArrowheads="1" noChangeShapeType="1" noTextEdit="1"/>
+              </p:cNvSpPr>
+              <p:nvPr>
+                <p:ph type="title"/>
+              </p:nvPr>
+            </p:nvSpPr>
+            <p:spPr>
+              <a:xfrm>
+                <a:off x="859245" y="707903"/>
+                <a:ext cx="9137012" cy="1280160"/>
+              </a:xfrm>
+              <a:blipFill>
+                <a:blip r:embed="rId2"/>
+                <a:stretch>
+                  <a:fillRect l="-3402" b="-20000"/>
+                </a:stretch>
+              </a:blipFill>
+            </p:spPr>
+            <p:txBody>
+              <a:bodyPr/>
+              <a:lstStyle/>
+              <a:p>
+                <a:r>
+                  <a:rPr lang="it-IT">
+                    <a:noFill/>
+                  </a:rPr>
+                  <a:t> </a:t>
+                </a:r>
+              </a:p>
+            </p:txBody>
+          </p:sp>
+        </mc:Fallback>
+      </mc:AlternateContent>
+      <p:sp>
+        <p:nvSpPr>
+          <p:cNvPr id="3" name="CasellaDiTesto 2">
+            <a:extLst>
+              <a:ext uri="{FF2B5EF4-FFF2-40B4-BE49-F238E27FC236}">
+                <a16:creationId xmlns:a16="http://schemas.microsoft.com/office/drawing/2014/main" id="{9FE554FB-E4ED-2521-89D5-6E3482C611AE}"/>
+              </a:ext>
+            </a:extLst>
+          </p:cNvPr>
+          <p:cNvSpPr txBox="1"/>
+          <p:nvPr/>
+        </p:nvSpPr>
+        <p:spPr>
+          <a:xfrm>
+            <a:off x="1607127" y="3768437"/>
+            <a:ext cx="2216727" cy="369332"/>
+          </a:xfrm>
+          <a:prstGeom prst="rect">
+            <a:avLst/>
+          </a:prstGeom>
+          <a:noFill/>
+        </p:spPr>
+        <p:txBody>
+          <a:bodyPr wrap="square" rtlCol="0">
+            <a:spAutoFit/>
+          </a:bodyPr>
+          <a:lstStyle/>
+          <a:p>
+            <a:r>
+              <a:rPr lang="it-IT" dirty="0">
+                <a:solidFill>
+                  <a:schemeClr val="bg1">
+                    <a:lumMod val="75000"/>
+                  </a:schemeClr>
+                </a:solidFill>
+              </a:rPr>
+              <a:t>Preliminary </a:t>
+            </a:r>
+            <a:r>
+              <a:rPr lang="it-IT" dirty="0" err="1">
+                <a:solidFill>
+                  <a:schemeClr val="bg1">
+                    <a:lumMod val="75000"/>
+                  </a:schemeClr>
+                </a:solidFill>
+              </a:rPr>
+              <a:t>results</a:t>
+            </a:r>
+            <a:endParaRPr lang="it-IT" dirty="0">
+              <a:solidFill>
+                <a:schemeClr val="bg1">
+                  <a:lumMod val="75000"/>
+                </a:schemeClr>
+              </a:solidFill>
+            </a:endParaRPr>
+          </a:p>
+        </p:txBody>
+      </p:sp>
+      <p:sp>
+        <p:nvSpPr>
+          <p:cNvPr id="7" name="Segnaposto contenuto 6">
+            <a:extLst>
+              <a:ext uri="{FF2B5EF4-FFF2-40B4-BE49-F238E27FC236}">
+                <a16:creationId xmlns:a16="http://schemas.microsoft.com/office/drawing/2014/main" id="{727F2FD4-C6BE-B430-F3B4-01C78CB6FFDD}"/>
+              </a:ext>
+            </a:extLst>
+          </p:cNvPr>
+          <p:cNvSpPr>
+            <a:spLocks noGrp="1"/>
+          </p:cNvSpPr>
+          <p:nvPr>
+            <p:ph sz="half" idx="2"/>
+          </p:nvPr>
+        </p:nvSpPr>
+        <p:spPr>
+          <a:xfrm>
+            <a:off x="946297" y="2327440"/>
+            <a:ext cx="5741581" cy="498887"/>
+          </a:xfrm>
+        </p:spPr>
+        <p:txBody>
+          <a:bodyPr/>
+          <a:lstStyle/>
+          <a:p>
+            <a:r>
+              <a:rPr lang="it-IT" dirty="0"/>
+              <a:t>Sn IIP model by </a:t>
+            </a:r>
+            <a:r>
+              <a:rPr lang="it-IT" dirty="0" err="1"/>
+              <a:t>Murase</a:t>
+            </a:r>
+            <a:r>
+              <a:rPr lang="it-IT" dirty="0"/>
+              <a:t>, sources </a:t>
+            </a:r>
+            <a:r>
+              <a:rPr lang="it-IT" dirty="0" err="1"/>
+              <a:t>distance</a:t>
+            </a:r>
+            <a:r>
+              <a:rPr lang="it-IT" dirty="0"/>
+              <a:t> d=1Mpc, </a:t>
+            </a:r>
+            <a:r>
+              <a:rPr lang="it-IT" dirty="0" err="1"/>
+              <a:t>numu+anumu</a:t>
+            </a:r>
+            <a:endParaRPr lang="it-IT" dirty="0"/>
+          </a:p>
+        </p:txBody>
+      </p:sp>
+      <p:pic>
+        <p:nvPicPr>
+          <p:cNvPr id="11" name="Immagine 10">
+            <a:extLst>
+              <a:ext uri="{FF2B5EF4-FFF2-40B4-BE49-F238E27FC236}">
+                <a16:creationId xmlns:a16="http://schemas.microsoft.com/office/drawing/2014/main" id="{78D234D5-0244-4187-14C6-80A54B0D420E}"/>
+              </a:ext>
+            </a:extLst>
+          </p:cNvPr>
+          <p:cNvPicPr>
+            <a:picLocks noChangeAspect="1"/>
+          </p:cNvPicPr>
+          <p:nvPr/>
+        </p:nvPicPr>
+        <p:blipFill>
+          <a:blip r:embed="rId3"/>
+          <a:srcRect/>
+          <a:stretch/>
+        </p:blipFill>
+        <p:spPr>
+          <a:xfrm>
+            <a:off x="615089" y="2980378"/>
+            <a:ext cx="5852408" cy="3124260"/>
+          </a:xfrm>
+          <a:prstGeom prst="rect">
+            <a:avLst/>
+          </a:prstGeom>
+        </p:spPr>
+      </p:pic>
+      <p:pic>
+        <p:nvPicPr>
+          <p:cNvPr id="14" name="Immagine 13">
+            <a:extLst>
+              <a:ext uri="{FF2B5EF4-FFF2-40B4-BE49-F238E27FC236}">
+                <a16:creationId xmlns:a16="http://schemas.microsoft.com/office/drawing/2014/main" id="{9989144C-C237-871F-604F-6AA74D5780AF}"/>
+              </a:ext>
+            </a:extLst>
+          </p:cNvPr>
+          <p:cNvPicPr>
+            <a:picLocks noChangeAspect="1"/>
+          </p:cNvPicPr>
+          <p:nvPr/>
+        </p:nvPicPr>
+        <p:blipFill>
+          <a:blip r:embed="rId4"/>
+          <a:srcRect/>
+          <a:stretch/>
+        </p:blipFill>
+        <p:spPr>
+          <a:xfrm>
+            <a:off x="6467497" y="2142114"/>
+            <a:ext cx="5454392" cy="4184506"/>
+          </a:xfrm>
+          <a:prstGeom prst="rect">
+            <a:avLst/>
+          </a:prstGeom>
+        </p:spPr>
+      </p:pic>
+    </p:spTree>
+    <p:extLst>
+      <p:ext uri="{BB962C8B-B14F-4D97-AF65-F5344CB8AC3E}">
+        <p14:creationId xmlns:p14="http://schemas.microsoft.com/office/powerpoint/2010/main" val="320150838"/>
       </p:ext>
     </p:extLst>
   </p:cSld>
@@ -22175,7 +24585,7 @@
         </p:nvSpPr>
         <p:spPr>
           <a:xfrm>
-            <a:off x="4603491" y="2465677"/>
+            <a:off x="4623019" y="2430356"/>
             <a:ext cx="1773382" cy="3256250"/>
           </a:xfrm>
           <a:prstGeom prst="rect">
@@ -25279,15 +27689,6 @@
 </file>
 
 <file path=customXml/item1.xml><?xml version="1.0" encoding="utf-8"?>
-<?mso-contentType ?>
-<FormTemplates xmlns="http://schemas.microsoft.com/sharepoint/v3/contenttype/forms">
-  <Display>DocumentLibraryForm</Display>
-  <Edit>DocumentLibraryForm</Edit>
-  <New>DocumentLibraryForm</New>
-</FormTemplates>
-</file>
-
-<file path=customXml/item2.xml><?xml version="1.0" encoding="utf-8"?>
 <ct:contentTypeSchema xmlns:ct="http://schemas.microsoft.com/office/2006/metadata/contentType" xmlns:ma="http://schemas.microsoft.com/office/2006/metadata/properties/metaAttributes" ct:_="" ma:_="" ma:contentTypeName="Document" ma:contentTypeID="0x0101006775525D67BA834FA1DAF790569B7267" ma:contentTypeVersion="13" ma:contentTypeDescription="Create a new document." ma:contentTypeScope="" ma:versionID="f9a19540f5d3371a5174c363c0e6b963">
   <xsd:schema xmlns:xsd="http://www.w3.org/2001/XMLSchema" xmlns:xs="http://www.w3.org/2001/XMLSchema" xmlns:p="http://schemas.microsoft.com/office/2006/metadata/properties" xmlns:ns3="5207ff34-3743-463f-9dbd-a51e05628c3b" xmlns:ns4="2050b3c5-dea8-480d-a7f2-677a4223c29a" targetNamespace="http://schemas.microsoft.com/office/2006/metadata/properties" ma:root="true" ma:fieldsID="5a19218456eb811505c9ad5fcba538ea" ns3:_="" ns4:_="">
     <xsd:import namespace="5207ff34-3743-463f-9dbd-a51e05628c3b"/>
@@ -25506,6 +27907,15 @@
 </ct:contentTypeSchema>
 </file>
 
+<file path=customXml/item2.xml><?xml version="1.0" encoding="utf-8"?>
+<?mso-contentType ?>
+<FormTemplates xmlns="http://schemas.microsoft.com/sharepoint/v3/contenttype/forms">
+  <Display>DocumentLibraryForm</Display>
+  <Edit>DocumentLibraryForm</Edit>
+  <New>DocumentLibraryForm</New>
+</FormTemplates>
+</file>
+
 <file path=customXml/item3.xml><?xml version="1.0" encoding="utf-8"?>
 <p:properties xmlns:p="http://schemas.microsoft.com/office/2006/metadata/properties" xmlns:xsi="http://www.w3.org/2001/XMLSchema-instance" xmlns:pc="http://schemas.microsoft.com/office/infopath/2007/PartnerControls">
   <documentManagement>
@@ -25515,14 +27925,6 @@
 </file>
 
 <file path=customXml/itemProps1.xml><?xml version="1.0" encoding="utf-8"?>
-<ds:datastoreItem xmlns:ds="http://schemas.openxmlformats.org/officeDocument/2006/customXml" ds:itemID="{FABD9919-8F5A-4B99-83E1-E90FE1DCF2E1}">
-  <ds:schemaRefs>
-    <ds:schemaRef ds:uri="http://schemas.microsoft.com/sharepoint/v3/contenttype/forms"/>
-  </ds:schemaRefs>
-</ds:datastoreItem>
-</file>
-
-<file path=customXml/itemProps2.xml><?xml version="1.0" encoding="utf-8"?>
 <ds:datastoreItem xmlns:ds="http://schemas.openxmlformats.org/officeDocument/2006/customXml" ds:itemID="{0F861050-1819-4C8E-889D-5A0EC17E6629}">
   <ds:schemaRefs>
     <ds:schemaRef ds:uri="http://schemas.microsoft.com/office/2006/metadata/contentType"/>
@@ -25537,6 +27939,14 @@
     <ds:schemaRef ds:uri="http://purl.org/dc/elements/1.1/"/>
     <ds:schemaRef ds:uri="http://purl.org/dc/terms/"/>
     <ds:schemaRef ds:uri="http://schemas.microsoft.com/internal/obd"/>
+  </ds:schemaRefs>
+</ds:datastoreItem>
+</file>
+
+<file path=customXml/itemProps2.xml><?xml version="1.0" encoding="utf-8"?>
+<ds:datastoreItem xmlns:ds="http://schemas.openxmlformats.org/officeDocument/2006/customXml" ds:itemID="{FABD9919-8F5A-4B99-83E1-E90FE1DCF2E1}">
+  <ds:schemaRefs>
+    <ds:schemaRef ds:uri="http://schemas.microsoft.com/sharepoint/v3/contenttype/forms"/>
   </ds:schemaRefs>
 </ds:datastoreItem>
 </file>
